--- a/Presentation_Avantages_Sportifs.pptx
+++ b/Presentation_Avantages_Sportifs.pptx
@@ -13,8 +13,8 @@
     <p:sldId id="258" r:id="rId4"/>
     <p:sldId id="259" r:id="rId5"/>
     <p:sldId id="260" r:id="rId6"/>
-    <p:sldId id="273" r:id="rId7"/>
-    <p:sldId id="261" r:id="rId8"/>
+    <p:sldId id="261" r:id="rId7"/>
+    <p:sldId id="277" r:id="rId8"/>
     <p:sldId id="262" r:id="rId9"/>
     <p:sldId id="263" r:id="rId10"/>
     <p:sldId id="264" r:id="rId11"/>
@@ -390,7 +390,7 @@
           <a:p>
             <a:r>
               <a:rPr lang="en-US" dirty="0"/>
-              <a:t>Kestra orchestre l'ensemble du projet. Deux flows sont configurés. Le premier, flow_getdata, s'exécute toutes les 2 minutes pour synchroniser les activités Strava. Il est configuré pour n'autoriser qu'une seule exécution simultanée. Le deuxième flow, flow_powerbi, s'exécute chaque lundi matin à 6h. Il enchaîne tous les scripts dans l'ordre. En cas d'échec, Kestra réessaie automatiquement 3 fois. Dans tous les cas, une notification email est envoyée. L'interface web de Kestra permet de suivre en temps réel l'état des exécutions.</a:t>
+              <a:t>Un point important du POC est la validation des déclarations de mode de transport. Un salarié pourrait déclarer venir à pied pour bénéficier de la prime de trajet, alors qu'il habite à 40 kilomètres. Pour éviter cela, nous interrogeons l'API Google Maps Distance Matrix. Pour chaque salarié ayant déclaré venir à pied ou en vélo, nous calculons la distance réelle entre son domicile et son lieu de travail. Si la distance est supérieure au seuil défini, nous signalons une anomalie. Les RH reçoivent alors un email avec la liste des déclarations suspectes à vérifier.</a:t>
             </a:r>
           </a:p>
         </p:txBody>
@@ -412,7 +412,7 @@
           <a:p>
             <a:fld id="{F7021451-1387-4CA6-816F-3879F97B5CBC}" type="slidenum">
               <a:rPr lang="en-US"/>
-              <a:t>11</a:t>
+              <a:t>10</a:t>
             </a:fld>
             <a:endParaRPr lang="en-US"/>
           </a:p>
@@ -477,7 +477,7 @@
           <a:p>
             <a:r>
               <a:rPr lang="en-US" dirty="0"/>
-              <a:t>Sur la sécurité, nous avons appliqué les bonnes pratiques de base pour le POC. Aucun credential n'est hardcodé dans le code — tout passe par des variables d'environnement. Les fichiers .env sont exclus du git. Les requêtes SQL sont paramétrées pour prévenir les injections. Pour la production, plusieurs points sont à améliorer : remplacer le compte administrateur SQL par un compte avec des droits limités, mettre en place un vrai certificat TLS, et utiliser Kestra Enterprise pour la gestion native des secrets.</a:t>
+              <a:t>Kestra orchestre l'ensemble du projet. Deux flows sont configurés. Le premier, flow_getdata, s'exécute toutes les 2 minutes pour synchroniser les activités Strava. Il est configuré pour n'autoriser qu'une seule exécution simultanée. Le deuxième flow, flow_powerbi, s'exécute chaque lundi matin à 6h. Il enchaîne tous les scripts dans l'ordre. En cas d'échec, Kestra réessaie automatiquement 3 fois. Dans tous les cas, une notification email est envoyée. L'interface web de Kestra permet de suivre en temps réel l'état des exécutions.</a:t>
             </a:r>
           </a:p>
         </p:txBody>
@@ -499,7 +499,7 @@
           <a:p>
             <a:fld id="{F7021451-1387-4CA6-816F-3879F97B5CBC}" type="slidenum">
               <a:rPr lang="en-US"/>
-              <a:t>12</a:t>
+              <a:t>11</a:t>
             </a:fld>
             <a:endParaRPr lang="en-US"/>
           </a:p>
@@ -564,7 +564,7 @@
           <a:p>
             <a:r>
               <a:rPr lang="en-US" dirty="0"/>
-              <a:t>Nous avons construit deux rapports PowerBI. Le rapport RH donne une vue de pilotage complète avec quatre pages. La première est un tableau de bord avec les KPIs principaux filtrable par Business Unit. Les pages suivantes donnent le détail par salarié pour chaque avantage. La page sur les 5 jours bien-être affiche notamment un histogramme avec une ligne rouge à 15 activités — le seuil d'éligibilité — ce qui permet aux RH de voir d'un coup d'œil qui est proche du seuil.</a:t>
+              <a:t>Sur la sécurité, nous avons appliqué les bonnes pratiques de base pour le POC. Aucun credential n'est hardcodé dans le code — tout passe par des variables d'environnement. Les fichiers .env sont exclus du git. Les requêtes SQL sont paramétrées pour prévenir les injections. Pour la production, plusieurs points sont à améliorer : remplacer le compte administrateur SQL par un compte avec des droits limités, mettre en place un vrai certificat TLS, et utiliser Kestra Enterprise pour la gestion native des secrets.</a:t>
             </a:r>
           </a:p>
         </p:txBody>
@@ -586,7 +586,7 @@
           <a:p>
             <a:fld id="{F7021451-1387-4CA6-816F-3879F97B5CBC}" type="slidenum">
               <a:rPr lang="en-US"/>
-              <a:t>13</a:t>
+              <a:t>12</a:t>
             </a:fld>
             <a:endParaRPr lang="en-US"/>
           </a:p>
@@ -651,7 +651,7 @@
           <a:p>
             <a:r>
               <a:rPr lang="en-US" dirty="0"/>
-              <a:t>Le deuxième rapport est orienté employé. Chaque salarié peut consulter son propre tableau de bord : combien d'activités il a faites sur les 12 derniers mois, s'il est éligible aux 5 jours bien-être, et s'il est éligible à la prime de trajet. Une jauge visuelle montre sa progression vers le seuil des 15 activités. Pour le POC, nous avons utilisé un sélecteur d'identifiant pour simuler la vue par employé. En production, cela serait remplacé par du Row-Level Security sur PowerBI Service.</a:t>
+              <a:t>Nous avons construit deux rapports PowerBI. Le rapport RH donne une vue de pilotage complète avec quatre pages. La première est un tableau de bord avec les KPIs principaux filtrable par Business Unit. Les pages suivantes donnent le détail par salarié pour chaque avantage. La page sur les 5 jours bien-être affiche notamment un histogramme avec une ligne rouge à 15 activités — le seuil d'éligibilité — ce qui permet aux RH de voir d'un coup d'œil qui est proche du seuil.</a:t>
             </a:r>
           </a:p>
         </p:txBody>
@@ -673,7 +673,7 @@
           <a:p>
             <a:fld id="{F7021451-1387-4CA6-816F-3879F97B5CBC}" type="slidenum">
               <a:rPr lang="en-US"/>
-              <a:t>16</a:t>
+              <a:t>13</a:t>
             </a:fld>
             <a:endParaRPr lang="en-US"/>
           </a:p>
@@ -738,7 +738,7 @@
           <a:p>
             <a:r>
               <a:rPr lang="en-US" dirty="0"/>
-              <a:t>Le POC remplit ses objectifs. Nous avons démontré que la collecte OAuth Strava fonctionne de bout en bout. Le pipeline ETL enchaîne automatiquement l'export, le nettoyage, les tests qualité et le calcul des primes. Les notifications Slack arrivent en moins de 5 secondes. Les deux rapports PowerBI sont opérationnels et permettent aux RH et aux employés de consulter leurs données en temps réel.</a:t>
+              <a:t>Le deuxième rapport est orienté employé. Chaque salarié peut consulter son propre tableau de bord : combien d'activités il a faites sur les 12 derniers mois, s'il est éligible aux 5 jours bien-être, et s'il est éligible à la prime de trajet. Une jauge visuelle montre sa progression vers le seuil des 15 activités. Pour le POC, nous avons utilisé un sélecteur d'identifiant pour simuler la vue par employé. En production, cela serait remplacé par du Row-Level Security sur PowerBI Service.</a:t>
             </a:r>
           </a:p>
         </p:txBody>
@@ -760,7 +760,7 @@
           <a:p>
             <a:fld id="{F7021451-1387-4CA6-816F-3879F97B5CBC}" type="slidenum">
               <a:rPr lang="en-US"/>
-              <a:t>18</a:t>
+              <a:t>16</a:t>
             </a:fld>
             <a:endParaRPr lang="en-US"/>
           </a:p>
@@ -825,7 +825,7 @@
           <a:p>
             <a:r>
               <a:rPr lang="en-US" dirty="0"/>
-              <a:t>Avant de passer en production, plusieurs évolutions sont nécessaires. Les trois priorités hautes sont : la sécurité SQL, l'historisation des primes — aujourd'hui chaque calcul écrase le précédent — et la table de mapping entre identifiants Strava et employés RH. En priorité moyenne, le Row-Level Security sur PowerBI Service est indispensable pour le rapport employé en production.</a:t>
+              <a:t>Le POC remplit ses objectifs. Nous avons démontré que la collecte OAuth Strava fonctionne de bout en bout. Le pipeline ETL enchaîne automatiquement l'export, le nettoyage, les tests qualité et le calcul des primes. Les notifications Slack arrivent en moins de 5 secondes. Les deux rapports PowerBI sont opérationnels et permettent aux RH et aux employés de consulter leurs données en temps réel.</a:t>
             </a:r>
           </a:p>
         </p:txBody>
@@ -847,7 +847,7 @@
           <a:p>
             <a:fld id="{F7021451-1387-4CA6-816F-3879F97B5CBC}" type="slidenum">
               <a:rPr lang="en-US"/>
-              <a:t>19</a:t>
+              <a:t>18</a:t>
             </a:fld>
             <a:endParaRPr lang="en-US"/>
           </a:p>
@@ -912,7 +912,7 @@
           <a:p>
             <a:r>
               <a:rPr lang="en-US" dirty="0"/>
-              <a:t>En conclusion, ce POC démontre la faisabilité technique complète du projet. En partant de zéro, nous avons construit une architecture Docker modulaire qui collecte les données Strava via OAuth, les traite dans un pipeline ETL automatisé, calcule les primes en quelques secondes, notifie les équipes via Slack en temps réel, et présente les résultats dans des rapports PowerBI dédiés aux RH et aux employés. Ce qui prenait plusieurs heures de travail manuel peut maintenant être fait automatiquement chaque lundi matin. Merci pour votre attention.</a:t>
+              <a:t>Avant de passer en production, plusieurs évolutions sont nécessaires. Les trois priorités hautes sont : la sécurité SQL, l'historisation des primes — aujourd'hui chaque calcul écrase le précédent — et la table de mapping entre identifiants Strava et employés RH. En priorité moyenne, le Row-Level Security sur PowerBI Service est indispensable pour le rapport employé en production.</a:t>
             </a:r>
           </a:p>
         </p:txBody>
@@ -934,7 +934,7 @@
           <a:p>
             <a:fld id="{F7021451-1387-4CA6-816F-3879F97B5CBC}" type="slidenum">
               <a:rPr lang="en-US"/>
-              <a:t>20</a:t>
+              <a:t>19</a:t>
             </a:fld>
             <a:endParaRPr lang="en-US"/>
           </a:p>
@@ -999,6 +999,93 @@
           <a:p>
             <a:r>
               <a:rPr lang="en-US" dirty="0"/>
+              <a:t>En conclusion, ce POC démontre la faisabilité technique complète du projet. En partant de zéro, nous avons construit une architecture Docker modulaire qui collecte les données Strava via OAuth, les traite dans un pipeline ETL automatisé, calcule les primes en quelques secondes, notifie les équipes via Slack en temps réel, et présente les résultats dans des rapports PowerBI dédiés aux RH et aux employés. Ce qui prenait plusieurs heures de travail manuel peut maintenant être fait automatiquement chaque lundi matin. Merci pour votre attention.</a:t>
+            </a:r>
+          </a:p>
+        </p:txBody>
+      </p:sp>
+      <p:sp>
+        <p:nvSpPr>
+          <p:cNvPr id="4" name="Slide Number Placeholder 3"/>
+          <p:cNvSpPr>
+            <a:spLocks noGrp="1"/>
+          </p:cNvSpPr>
+          <p:nvPr>
+            <p:ph type="sldNum" sz="quarter" idx="10"/>
+          </p:nvPr>
+        </p:nvSpPr>
+        <p:spPr/>
+        <p:txBody>
+          <a:bodyPr/>
+          <a:lstStyle/>
+          <a:p>
+            <a:fld id="{F7021451-1387-4CA6-816F-3879F97B5CBC}" type="slidenum">
+              <a:rPr lang="en-US"/>
+              <a:t>20</a:t>
+            </a:fld>
+            <a:endParaRPr lang="en-US"/>
+          </a:p>
+        </p:txBody>
+      </p:sp>
+    </p:spTree>
+    <p:extLst>
+      <p:ext uri="{BB962C8B-B14F-4D97-AF65-F5344CB8AC3E}">
+        <p14:creationId xmlns:p14="http://schemas.microsoft.com/office/powerpoint/2010/main" val="1024086991"/>
+      </p:ext>
+    </p:extLst>
+  </p:cSld>
+  <p:clrMapOvr>
+    <a:masterClrMapping/>
+  </p:clrMapOvr>
+</p:notes>
+</file>
+
+<file path=ppt/notesSlides/notesSlide18.xml><?xml version="1.0" encoding="utf-8"?>
+<p:notes xmlns:a="http://schemas.openxmlformats.org/drawingml/2006/main" xmlns:r="http://schemas.openxmlformats.org/officeDocument/2006/relationships" xmlns:p="http://schemas.openxmlformats.org/presentationml/2006/main">
+  <p:cSld>
+    <p:spTree>
+      <p:nvGrpSpPr>
+        <p:cNvPr id="1" name=""/>
+        <p:cNvGrpSpPr/>
+        <p:nvPr/>
+      </p:nvGrpSpPr>
+      <p:grpSpPr>
+        <a:xfrm>
+          <a:off x="0" y="0"/>
+          <a:ext cx="0" cy="0"/>
+          <a:chOff x="0" y="0"/>
+          <a:chExt cx="0" cy="0"/>
+        </a:xfrm>
+      </p:grpSpPr>
+      <p:sp>
+        <p:nvSpPr>
+          <p:cNvPr id="2" name="Slide Image Placeholder 1"/>
+          <p:cNvSpPr>
+            <a:spLocks noGrp="1" noRot="1" noChangeAspect="1"/>
+          </p:cNvSpPr>
+          <p:nvPr>
+            <p:ph type="sldImg"/>
+          </p:nvPr>
+        </p:nvSpPr>
+        <p:spPr/>
+      </p:sp>
+      <p:sp>
+        <p:nvSpPr>
+          <p:cNvPr id="3" name="Notes Placeholder 2"/>
+          <p:cNvSpPr>
+            <a:spLocks noGrp="1"/>
+          </p:cNvSpPr>
+          <p:nvPr>
+            <p:ph type="body" idx="1"/>
+          </p:nvPr>
+        </p:nvSpPr>
+        <p:spPr/>
+        <p:txBody>
+          <a:bodyPr/>
+          <a:lstStyle/>
+          <a:p>
+            <a:r>
+              <a:rPr lang="en-US" dirty="0"/>
               <a:t>Je vous remercie pour votre attention. N'hésitez pas à poser vos questions sur l'architecture, les choix techniques, ou les évolutions envisagées.</a:t>
             </a:r>
           </a:p>
@@ -1440,10 +1527,7 @@
           <a:bodyPr/>
           <a:lstStyle/>
           <a:p>
-            <a:r>
-              <a:rPr lang="en-US" dirty="0"/>
-              <a:t>Voici comment fonctionne la collecte des données Strava. Chaque salarié reçoit un email personnalisé avec un lien unique. Ce lien contient son identifiant employé dans le paramètre state de la requête OAuth. Quand il clique et autorise l'application sur Strava, Strava nous renvoie ce même identifiant avec les tokens d'accès. On sait donc exactement à quel employé RH correspondent les données Strava. La clé technique ici est l'utilisation du paramètre state d'OAuth 2.0 — c'est une fonctionnalité standard du protocole qui nous permet de lier chaque autorisation à un identifiant employé sans créer de compte utilisateur supplémentaire.</a:t>
-            </a:r>
+            <a:endParaRPr lang="en-US" dirty="0"/>
           </a:p>
         </p:txBody>
       </p:sp>
@@ -1464,7 +1548,7 @@
           <a:p>
             <a:fld id="{F7021451-1387-4CA6-816F-3879F97B5CBC}" type="slidenum">
               <a:rPr lang="en-US"/>
-              <a:t>7</a:t>
+              <a:t>6</a:t>
             </a:fld>
             <a:endParaRPr lang="en-US"/>
           </a:p>
@@ -1488,7 +1572,13 @@
   <p:cSld>
     <p:spTree>
       <p:nvGrpSpPr>
-        <p:cNvPr id="1" name=""/>
+        <p:cNvPr id="1" name="">
+          <a:extLst>
+            <a:ext uri="{FF2B5EF4-FFF2-40B4-BE49-F238E27FC236}">
+              <a16:creationId xmlns:a16="http://schemas.microsoft.com/office/drawing/2014/main" id="{8C315660-2B38-BFBE-51DF-B1F9AAFB1492}"/>
+            </a:ext>
+          </a:extLst>
+        </p:cNvPr>
         <p:cNvGrpSpPr/>
         <p:nvPr/>
       </p:nvGrpSpPr>
@@ -1502,7 +1592,13 @@
       </p:grpSpPr>
       <p:sp>
         <p:nvSpPr>
-          <p:cNvPr id="2" name="Slide Image Placeholder 1"/>
+          <p:cNvPr id="2" name="Slide Image Placeholder 1">
+            <a:extLst>
+              <a:ext uri="{FF2B5EF4-FFF2-40B4-BE49-F238E27FC236}">
+                <a16:creationId xmlns:a16="http://schemas.microsoft.com/office/drawing/2014/main" id="{4A0D0008-2D35-DF07-FDFD-7FF0816B21D4}"/>
+              </a:ext>
+            </a:extLst>
+          </p:cNvPr>
           <p:cNvSpPr>
             <a:spLocks noGrp="1" noRot="1" noChangeAspect="1"/>
           </p:cNvSpPr>
@@ -1514,7 +1610,13 @@
       </p:sp>
       <p:sp>
         <p:nvSpPr>
-          <p:cNvPr id="3" name="Notes Placeholder 2"/>
+          <p:cNvPr id="3" name="Notes Placeholder 2">
+            <a:extLst>
+              <a:ext uri="{FF2B5EF4-FFF2-40B4-BE49-F238E27FC236}">
+                <a16:creationId xmlns:a16="http://schemas.microsoft.com/office/drawing/2014/main" id="{CC0CD752-0555-04D2-C83C-5D457830D393}"/>
+              </a:ext>
+            </a:extLst>
+          </p:cNvPr>
           <p:cNvSpPr>
             <a:spLocks noGrp="1"/>
           </p:cNvSpPr>
@@ -1529,14 +1631,20 @@
           <a:p>
             <a:r>
               <a:rPr lang="en-US" dirty="0"/>
-              <a:t>Le deuxième flow gère les notifications Slack en temps réel. Dès qu'un salarié enregistre une nouvelle activité sur Strava, notre système la détecte et envoie une notification sur Slack en quelques secondes. Techniquement, nous utilisons le CDC — Change Data Capture — de SQL Server. Debezium capture ces événements et les envoie en HTTP à notre service Flask. Flask filtre uniquement les insertions et poste le message sur Slack. Un point important : nous avons évité Kafka, qui aurait ajouté une complexité importante. Debezium peut fonctionner avec un simple fichier local pour stocker sa position de lecture.</a:t>
-            </a:r>
-          </a:p>
-        </p:txBody>
-      </p:sp>
-      <p:sp>
-        <p:nvSpPr>
-          <p:cNvPr id="4" name="Slide Number Placeholder 3"/>
+              <a:t>Voici comment fonctionne la collecte des données Strava. Chaque salarié reçoit un email personnalisé avec un lien unique. Ce lien contient son identifiant employé dans le paramètre state de la requête OAuth. Quand il clique et autorise l'application sur Strava, Strava nous renvoie ce même identifiant avec les tokens d'accès. On sait donc exactement à quel employé RH correspondent les données Strava. La clé technique ici est l'utilisation du paramètre state d'OAuth 2.0 — c'est une fonctionnalité standard du protocole qui nous permet de lier chaque autorisation à un identifiant employé sans créer de compte utilisateur supplémentaire.</a:t>
+            </a:r>
+          </a:p>
+        </p:txBody>
+      </p:sp>
+      <p:sp>
+        <p:nvSpPr>
+          <p:cNvPr id="4" name="Slide Number Placeholder 3">
+            <a:extLst>
+              <a:ext uri="{FF2B5EF4-FFF2-40B4-BE49-F238E27FC236}">
+                <a16:creationId xmlns:a16="http://schemas.microsoft.com/office/drawing/2014/main" id="{3C9F893F-0C2C-B25D-75CE-02C5560E2CFA}"/>
+              </a:ext>
+            </a:extLst>
+          </p:cNvPr>
           <p:cNvSpPr>
             <a:spLocks noGrp="1"/>
           </p:cNvSpPr>
@@ -1551,7 +1659,7 @@
           <a:p>
             <a:fld id="{F7021451-1387-4CA6-816F-3879F97B5CBC}" type="slidenum">
               <a:rPr lang="en-US"/>
-              <a:t>8</a:t>
+              <a:t>7</a:t>
             </a:fld>
             <a:endParaRPr lang="en-US"/>
           </a:p>
@@ -1560,7 +1668,7 @@
     </p:spTree>
     <p:extLst>
       <p:ext uri="{BB962C8B-B14F-4D97-AF65-F5344CB8AC3E}">
-        <p14:creationId xmlns:p14="http://schemas.microsoft.com/office/powerpoint/2010/main" val="1024086991"/>
+        <p14:creationId xmlns:p14="http://schemas.microsoft.com/office/powerpoint/2010/main" val="2921832166"/>
       </p:ext>
     </p:extLst>
   </p:cSld>
@@ -1616,7 +1724,7 @@
           <a:p>
             <a:r>
               <a:rPr lang="en-US" dirty="0"/>
-              <a:t>Le troisième flow est le pipeline ETL. Il enchaîne trois conteneurs. Le premier exporte les données brutes depuis SQL Server, les passe dans DuckDB pour les enrichir, puis les réinsère proprement. Il nettoie également les données : suppression des doublons, normalisation des formats. Le deuxième conteneur exécute des tests qualité automatisés et envoie un rapport par email. Le troisième conteneur calcule les deux primes. Les résultats sont exportés à la fois en base SQL Server et en fichiers Excel horodatés.</a:t>
+              <a:t>Le deuxième flow gère les notifications Slack en temps réel. Dès qu'un salarié enregistre une nouvelle activité sur Strava, notre système la détecte et envoie une notification sur Slack en quelques secondes. Techniquement, nous utilisons le CDC — Change Data Capture — de SQL Server. Debezium capture ces événements et les envoie en HTTP à notre service Flask. Flask filtre uniquement les insertions et poste le message sur Slack. Un point important : nous avons évité Kafka, qui aurait ajouté une complexité importante. Debezium peut fonctionner avec un simple fichier local pour stocker sa position de lecture.</a:t>
             </a:r>
           </a:p>
         </p:txBody>
@@ -1638,7 +1746,7 @@
           <a:p>
             <a:fld id="{F7021451-1387-4CA6-816F-3879F97B5CBC}" type="slidenum">
               <a:rPr lang="en-US"/>
-              <a:t>9</a:t>
+              <a:t>8</a:t>
             </a:fld>
             <a:endParaRPr lang="en-US"/>
           </a:p>
@@ -1703,7 +1811,7 @@
           <a:p>
             <a:r>
               <a:rPr lang="en-US" dirty="0"/>
-              <a:t>Un point important du POC est la validation des déclarations de mode de transport. Un salarié pourrait déclarer venir à pied pour bénéficier de la prime de trajet, alors qu'il habite à 40 kilomètres. Pour éviter cela, nous interrogeons l'API Google Maps Distance Matrix. Pour chaque salarié ayant déclaré venir à pied ou en vélo, nous calculons la distance réelle entre son domicile et son lieu de travail. Si la distance est supérieure au seuil défini, nous signalons une anomalie. Les RH reçoivent alors un email avec la liste des déclarations suspectes à vérifier.</a:t>
+              <a:t>Le troisième flow est le pipeline ETL. Il enchaîne trois conteneurs. Le premier exporte les données brutes depuis SQL Server, les passe dans DuckDB pour les enrichir, puis les réinsère proprement. Il nettoie également les données : suppression des doublons, normalisation des formats. Le deuxième conteneur exécute des tests qualité automatisés et envoie un rapport par email. Le troisième conteneur calcule les deux primes. Les résultats sont exportés à la fois en base SQL Server et en fichiers Excel horodatés.</a:t>
             </a:r>
           </a:p>
         </p:txBody>
@@ -1725,7 +1833,7 @@
           <a:p>
             <a:fld id="{F7021451-1387-4CA6-816F-3879F97B5CBC}" type="slidenum">
               <a:rPr lang="en-US"/>
-              <a:t>10</a:t>
+              <a:t>9</a:t>
             </a:fld>
             <a:endParaRPr lang="en-US"/>
           </a:p>
@@ -13725,2383 +13833,6 @@
 
 <file path=ppt/slides/slide6.xml><?xml version="1.0" encoding="utf-8"?>
 <p:sld xmlns:a="http://schemas.openxmlformats.org/drawingml/2006/main" xmlns:r="http://schemas.openxmlformats.org/officeDocument/2006/relationships" xmlns:p="http://schemas.openxmlformats.org/presentationml/2006/main">
-  <p:cSld>
-    <p:spTree>
-      <p:nvGrpSpPr>
-        <p:cNvPr id="1" name=""/>
-        <p:cNvGrpSpPr/>
-        <p:nvPr/>
-      </p:nvGrpSpPr>
-      <p:grpSpPr>
-        <a:xfrm>
-          <a:off x="0" y="0"/>
-          <a:ext cx="0" cy="0"/>
-          <a:chOff x="0" y="0"/>
-          <a:chExt cx="0" cy="0"/>
-        </a:xfrm>
-      </p:grpSpPr>
-      <p:sp>
-        <p:nvSpPr>
-          <p:cNvPr id="40" name="rect"/>
-          <p:cNvSpPr>
-            <a:spLocks noGrp="1"/>
-          </p:cNvSpPr>
-          <p:nvPr/>
-        </p:nvSpPr>
-        <p:spPr>
-          <a:xfrm>
-            <a:off x="0" y="0"/>
-            <a:ext cx="9144000" cy="5143500"/>
-          </a:xfrm>
-          <a:prstGeom prst="rect">
-            <a:avLst/>
-          </a:prstGeom>
-          <a:solidFill>
-            <a:srgbClr val="1A1A2E"/>
-          </a:solidFill>
-          <a:ln>
-            <a:noFill/>
-          </a:ln>
-        </p:spPr>
-        <p:txBody>
-          <a:bodyPr/>
-          <a:lstStyle/>
-          <a:p>
-            <a:endParaRPr/>
-          </a:p>
-        </p:txBody>
-      </p:sp>
-      <p:sp>
-        <p:nvSpPr>
-          <p:cNvPr id="2" name="TextBox 1"/>
-          <p:cNvSpPr txBox="1"/>
-          <p:nvPr/>
-        </p:nvSpPr>
-        <p:spPr>
-          <a:xfrm>
-            <a:off x="274320" y="91440"/>
-            <a:ext cx="8595360" cy="457200"/>
-          </a:xfrm>
-          <a:prstGeom prst="rect">
-            <a:avLst/>
-          </a:prstGeom>
-          <a:noFill/>
-        </p:spPr>
-        <p:txBody>
-          <a:bodyPr wrap="square">
-            <a:spAutoFit/>
-          </a:bodyPr>
-          <a:lstStyle/>
-          <a:p>
-            <a:pPr algn="ctr"/>
-            <a:r>
-              <a:rPr sz="2200" b="1" i="0">
-                <a:solidFill>
-                  <a:srgbClr val="FFFFFF"/>
-                </a:solidFill>
-              </a:rPr>
-              <a:t>Schéma de l'architecture complète</a:t>
-            </a:r>
-          </a:p>
-        </p:txBody>
-      </p:sp>
-      <p:sp>
-        <p:nvSpPr>
-          <p:cNvPr id="3" name="TextBox 2"/>
-          <p:cNvSpPr txBox="1"/>
-          <p:nvPr/>
-        </p:nvSpPr>
-        <p:spPr>
-          <a:xfrm>
-            <a:off x="274320" y="502920"/>
-            <a:ext cx="8595360" cy="256032"/>
-          </a:xfrm>
-          <a:prstGeom prst="rect">
-            <a:avLst/>
-          </a:prstGeom>
-          <a:noFill/>
-        </p:spPr>
-        <p:txBody>
-          <a:bodyPr wrap="square">
-            <a:spAutoFit/>
-          </a:bodyPr>
-          <a:lstStyle/>
-          <a:p>
-            <a:pPr algn="ctr"/>
-            <a:r>
-              <a:rPr sz="1000" b="0" i="0">
-                <a:solidFill>
-                  <a:srgbClr val="8888AA"/>
-                </a:solidFill>
-              </a:rPr>
-              <a:t>Réseau Docker partagé : strava_network</a:t>
-            </a:r>
-          </a:p>
-        </p:txBody>
-      </p:sp>
-      <p:sp>
-        <p:nvSpPr>
-          <p:cNvPr id="41" name="rect"/>
-          <p:cNvSpPr>
-            <a:spLocks noGrp="1"/>
-          </p:cNvSpPr>
-          <p:nvPr/>
-        </p:nvSpPr>
-        <p:spPr>
-          <a:xfrm>
-            <a:off x="228600" y="868680"/>
-            <a:ext cx="2743200" cy="2377440"/>
-          </a:xfrm>
-          <a:prstGeom prst="rect">
-            <a:avLst/>
-          </a:prstGeom>
-          <a:solidFill>
-            <a:srgbClr val="16213E"/>
-          </a:solidFill>
-          <a:ln w="19050">
-            <a:solidFill>
-              <a:srgbClr val="FC4C02"/>
-            </a:solidFill>
-          </a:ln>
-        </p:spPr>
-        <p:txBody>
-          <a:bodyPr/>
-          <a:lstStyle/>
-          <a:p>
-            <a:endParaRPr/>
-          </a:p>
-        </p:txBody>
-      </p:sp>
-      <p:sp>
-        <p:nvSpPr>
-          <p:cNvPr id="4" name="TextBox 3"/>
-          <p:cNvSpPr txBox="1"/>
-          <p:nvPr/>
-        </p:nvSpPr>
-        <p:spPr>
-          <a:xfrm>
-            <a:off x="320040" y="914400"/>
-            <a:ext cx="2560320" cy="274320"/>
-          </a:xfrm>
-          <a:prstGeom prst="rect">
-            <a:avLst/>
-          </a:prstGeom>
-          <a:noFill/>
-        </p:spPr>
-        <p:txBody>
-          <a:bodyPr wrap="square">
-            <a:spAutoFit/>
-          </a:bodyPr>
-          <a:lstStyle/>
-          <a:p>
-            <a:pPr algn="l"/>
-            <a:r>
-              <a:rPr sz="900" b="1" i="0">
-                <a:solidFill>
-                  <a:srgbClr val="FC4C02"/>
-                </a:solidFill>
-              </a:rPr>
-              <a:t>Docker Compose 1 — Collecte Strava</a:t>
-            </a:r>
-          </a:p>
-        </p:txBody>
-      </p:sp>
-      <p:sp>
-        <p:nvSpPr>
-          <p:cNvPr id="42" name="rect"/>
-          <p:cNvSpPr>
-            <a:spLocks noGrp="1"/>
-          </p:cNvSpPr>
-          <p:nvPr/>
-        </p:nvSpPr>
-        <p:spPr>
-          <a:xfrm>
-            <a:off x="320040" y="1216152"/>
-            <a:ext cx="1143000" cy="502920"/>
-          </a:xfrm>
-          <a:prstGeom prst="rect">
-            <a:avLst/>
-          </a:prstGeom>
-          <a:solidFill>
-            <a:srgbClr val="0F3460"/>
-          </a:solidFill>
-          <a:ln w="12700">
-            <a:solidFill>
-              <a:srgbClr val="4A90D9"/>
-            </a:solidFill>
-          </a:ln>
-        </p:spPr>
-        <p:txBody>
-          <a:bodyPr/>
-          <a:lstStyle/>
-          <a:p>
-            <a:endParaRPr/>
-          </a:p>
-        </p:txBody>
-      </p:sp>
-      <p:sp>
-        <p:nvSpPr>
-          <p:cNvPr id="5" name="TextBox 4"/>
-          <p:cNvSpPr txBox="1"/>
-          <p:nvPr/>
-        </p:nvSpPr>
-        <p:spPr>
-          <a:xfrm>
-            <a:off x="338328" y="1234440"/>
-            <a:ext cx="1097280" cy="182880"/>
-          </a:xfrm>
-          <a:prstGeom prst="rect">
-            <a:avLst/>
-          </a:prstGeom>
-          <a:noFill/>
-        </p:spPr>
-        <p:txBody>
-          <a:bodyPr wrap="square">
-            <a:spAutoFit/>
-          </a:bodyPr>
-          <a:lstStyle/>
-          <a:p>
-            <a:pPr algn="l"/>
-            <a:r>
-              <a:rPr sz="800" b="1" i="0">
-                <a:solidFill>
-                  <a:srgbClr val="4A90D9"/>
-                </a:solidFill>
-              </a:rPr>
-              <a:t>SQL Server 2022</a:t>
-            </a:r>
-          </a:p>
-        </p:txBody>
-      </p:sp>
-      <p:sp>
-        <p:nvSpPr>
-          <p:cNvPr id="6" name="TextBox 5"/>
-          <p:cNvSpPr txBox="1"/>
-          <p:nvPr/>
-        </p:nvSpPr>
-        <p:spPr>
-          <a:xfrm>
-            <a:off x="338328" y="1399031"/>
-            <a:ext cx="1097280" cy="292608"/>
-          </a:xfrm>
-          <a:prstGeom prst="rect">
-            <a:avLst/>
-          </a:prstGeom>
-          <a:noFill/>
-        </p:spPr>
-        <p:txBody>
-          <a:bodyPr wrap="square">
-            <a:spAutoFit/>
-          </a:bodyPr>
-          <a:lstStyle/>
-          <a:p>
-            <a:pPr algn="l"/>
-            <a:r>
-              <a:rPr sz="700" b="0" i="0">
-                <a:solidFill>
-                  <a:srgbClr val="AAAACC"/>
-                </a:solidFill>
-              </a:rPr>
-              <a:t>CDC activé
-StravaDb</a:t>
-            </a:r>
-          </a:p>
-        </p:txBody>
-      </p:sp>
-      <p:sp>
-        <p:nvSpPr>
-          <p:cNvPr id="43" name="rect"/>
-          <p:cNvSpPr>
-            <a:spLocks noGrp="1"/>
-          </p:cNvSpPr>
-          <p:nvPr/>
-        </p:nvSpPr>
-        <p:spPr>
-          <a:xfrm>
-            <a:off x="1600200" y="1216152"/>
-            <a:ext cx="1234440" cy="502920"/>
-          </a:xfrm>
-          <a:prstGeom prst="rect">
-            <a:avLst/>
-          </a:prstGeom>
-          <a:solidFill>
-            <a:srgbClr val="0F3460"/>
-          </a:solidFill>
-          <a:ln w="12700">
-            <a:solidFill>
-              <a:srgbClr val="7B68EE"/>
-            </a:solidFill>
-          </a:ln>
-        </p:spPr>
-        <p:txBody>
-          <a:bodyPr/>
-          <a:lstStyle/>
-          <a:p>
-            <a:endParaRPr/>
-          </a:p>
-        </p:txBody>
-      </p:sp>
-      <p:sp>
-        <p:nvSpPr>
-          <p:cNvPr id="7" name="TextBox 6"/>
-          <p:cNvSpPr txBox="1"/>
-          <p:nvPr/>
-        </p:nvSpPr>
-        <p:spPr>
-          <a:xfrm>
-            <a:off x="1618488" y="1234440"/>
-            <a:ext cx="1188720" cy="182880"/>
-          </a:xfrm>
-          <a:prstGeom prst="rect">
-            <a:avLst/>
-          </a:prstGeom>
-          <a:noFill/>
-        </p:spPr>
-        <p:txBody>
-          <a:bodyPr wrap="square">
-            <a:spAutoFit/>
-          </a:bodyPr>
-          <a:lstStyle/>
-          <a:p>
-            <a:pPr algn="l"/>
-            <a:r>
-              <a:rPr sz="800" b="1" i="0">
-                <a:solidFill>
-                  <a:srgbClr val="7B68EE"/>
-                </a:solidFill>
-              </a:rPr>
-              <a:t>webapp (ASP.NET)</a:t>
-            </a:r>
-          </a:p>
-        </p:txBody>
-      </p:sp>
-      <p:sp>
-        <p:nvSpPr>
-          <p:cNvPr id="8" name="TextBox 7"/>
-          <p:cNvSpPr txBox="1"/>
-          <p:nvPr/>
-        </p:nvSpPr>
-        <p:spPr>
-          <a:xfrm>
-            <a:off x="1618488" y="1399031"/>
-            <a:ext cx="1188720" cy="292608"/>
-          </a:xfrm>
-          <a:prstGeom prst="rect">
-            <a:avLst/>
-          </a:prstGeom>
-          <a:noFill/>
-        </p:spPr>
-        <p:txBody>
-          <a:bodyPr wrap="square">
-            <a:spAutoFit/>
-          </a:bodyPr>
-          <a:lstStyle/>
-          <a:p>
-            <a:pPr algn="l"/>
-            <a:r>
-              <a:rPr sz="700" b="0" i="0">
-                <a:solidFill>
-                  <a:srgbClr val="AAAACC"/>
-                </a:solidFill>
-              </a:rPr>
-              <a:t>OAuth redirect
-port 5001</a:t>
-            </a:r>
-          </a:p>
-        </p:txBody>
-      </p:sp>
-      <p:sp>
-        <p:nvSpPr>
-          <p:cNvPr id="44" name="rect"/>
-          <p:cNvSpPr>
-            <a:spLocks noGrp="1"/>
-          </p:cNvSpPr>
-          <p:nvPr/>
-        </p:nvSpPr>
-        <p:spPr>
-          <a:xfrm>
-            <a:off x="320040" y="1828800"/>
-            <a:ext cx="1143000" cy="502920"/>
-          </a:xfrm>
-          <a:prstGeom prst="rect">
-            <a:avLst/>
-          </a:prstGeom>
-          <a:solidFill>
-            <a:srgbClr val="0F3460"/>
-          </a:solidFill>
-          <a:ln w="12700">
-            <a:solidFill>
-              <a:srgbClr val="00C896"/>
-            </a:solidFill>
-          </a:ln>
-        </p:spPr>
-        <p:txBody>
-          <a:bodyPr/>
-          <a:lstStyle/>
-          <a:p>
-            <a:endParaRPr/>
-          </a:p>
-        </p:txBody>
-      </p:sp>
-      <p:sp>
-        <p:nvSpPr>
-          <p:cNvPr id="9" name="TextBox 8"/>
-          <p:cNvSpPr txBox="1"/>
-          <p:nvPr/>
-        </p:nvSpPr>
-        <p:spPr>
-          <a:xfrm>
-            <a:off x="338328" y="1847088"/>
-            <a:ext cx="1097280" cy="182880"/>
-          </a:xfrm>
-          <a:prstGeom prst="rect">
-            <a:avLst/>
-          </a:prstGeom>
-          <a:noFill/>
-        </p:spPr>
-        <p:txBody>
-          <a:bodyPr wrap="square">
-            <a:spAutoFit/>
-          </a:bodyPr>
-          <a:lstStyle/>
-          <a:p>
-            <a:pPr algn="l"/>
-            <a:r>
-              <a:rPr sz="800" b="1" i="0">
-                <a:solidFill>
-                  <a:srgbClr val="00C896"/>
-                </a:solidFill>
-              </a:rPr>
-              <a:t>getdata (Python)</a:t>
-            </a:r>
-          </a:p>
-        </p:txBody>
-      </p:sp>
-      <p:sp>
-        <p:nvSpPr>
-          <p:cNvPr id="10" name="TextBox 9"/>
-          <p:cNvSpPr txBox="1"/>
-          <p:nvPr/>
-        </p:nvSpPr>
-        <p:spPr>
-          <a:xfrm>
-            <a:off x="338328" y="2011680"/>
-            <a:ext cx="1097280" cy="292608"/>
-          </a:xfrm>
-          <a:prstGeom prst="rect">
-            <a:avLst/>
-          </a:prstGeom>
-          <a:noFill/>
-        </p:spPr>
-        <p:txBody>
-          <a:bodyPr wrap="square">
-            <a:spAutoFit/>
-          </a:bodyPr>
-          <a:lstStyle/>
-          <a:p>
-            <a:pPr algn="l"/>
-            <a:r>
-              <a:rPr sz="700" b="0" i="0">
-                <a:solidFill>
-                  <a:srgbClr val="AAAACC"/>
-                </a:solidFill>
-              </a:rPr>
-              <a:t>Sync activités
-toutes les 2min</a:t>
-            </a:r>
-          </a:p>
-        </p:txBody>
-      </p:sp>
-      <p:sp>
-        <p:nvSpPr>
-          <p:cNvPr id="45" name="rect"/>
-          <p:cNvSpPr>
-            <a:spLocks noGrp="1"/>
-          </p:cNvSpPr>
-          <p:nvPr/>
-        </p:nvSpPr>
-        <p:spPr>
-          <a:xfrm>
-            <a:off x="1600200" y="1828800"/>
-            <a:ext cx="1234440" cy="502920"/>
-          </a:xfrm>
-          <a:prstGeom prst="rect">
-            <a:avLst/>
-          </a:prstGeom>
-          <a:solidFill>
-            <a:srgbClr val="0F3460"/>
-          </a:solidFill>
-          <a:ln w="12700">
-            <a:solidFill>
-              <a:srgbClr val="FFB347"/>
-            </a:solidFill>
-          </a:ln>
-        </p:spPr>
-        <p:txBody>
-          <a:bodyPr/>
-          <a:lstStyle/>
-          <a:p>
-            <a:endParaRPr/>
-          </a:p>
-        </p:txBody>
-      </p:sp>
-      <p:sp>
-        <p:nvSpPr>
-          <p:cNvPr id="11" name="TextBox 10"/>
-          <p:cNvSpPr txBox="1"/>
-          <p:nvPr/>
-        </p:nvSpPr>
-        <p:spPr>
-          <a:xfrm>
-            <a:off x="1618488" y="1847088"/>
-            <a:ext cx="1188720" cy="182880"/>
-          </a:xfrm>
-          <a:prstGeom prst="rect">
-            <a:avLst/>
-          </a:prstGeom>
-          <a:noFill/>
-        </p:spPr>
-        <p:txBody>
-          <a:bodyPr wrap="square">
-            <a:spAutoFit/>
-          </a:bodyPr>
-          <a:lstStyle/>
-          <a:p>
-            <a:pPr algn="l"/>
-            <a:r>
-              <a:rPr sz="800" b="1" i="0">
-                <a:solidFill>
-                  <a:srgbClr val="FFB347"/>
-                </a:solidFill>
-              </a:rPr>
-              <a:t>send_email (Py)</a:t>
-            </a:r>
-          </a:p>
-        </p:txBody>
-      </p:sp>
-      <p:sp>
-        <p:nvSpPr>
-          <p:cNvPr id="12" name="TextBox 11"/>
-          <p:cNvSpPr txBox="1"/>
-          <p:nvPr/>
-        </p:nvSpPr>
-        <p:spPr>
-          <a:xfrm>
-            <a:off x="1618488" y="2011680"/>
-            <a:ext cx="1188720" cy="292608"/>
-          </a:xfrm>
-          <a:prstGeom prst="rect">
-            <a:avLst/>
-          </a:prstGeom>
-          <a:noFill/>
-        </p:spPr>
-        <p:txBody>
-          <a:bodyPr wrap="square">
-            <a:spAutoFit/>
-          </a:bodyPr>
-          <a:lstStyle/>
-          <a:p>
-            <a:pPr algn="l"/>
-            <a:r>
-              <a:rPr sz="700" b="0" i="0">
-                <a:solidFill>
-                  <a:srgbClr val="AAAACC"/>
-                </a:solidFill>
-              </a:rPr>
-              <a:t>Liens OAuth
-par salarié</a:t>
-            </a:r>
-          </a:p>
-        </p:txBody>
-      </p:sp>
-      <p:sp>
-        <p:nvSpPr>
-          <p:cNvPr id="46" name="rect"/>
-          <p:cNvSpPr>
-            <a:spLocks noGrp="1"/>
-          </p:cNvSpPr>
-          <p:nvPr/>
-        </p:nvSpPr>
-        <p:spPr>
-          <a:xfrm>
-            <a:off x="868680" y="2468880"/>
-            <a:ext cx="1371600" cy="502920"/>
-          </a:xfrm>
-          <a:prstGeom prst="rect">
-            <a:avLst/>
-          </a:prstGeom>
-          <a:solidFill>
-            <a:srgbClr val="0F3460"/>
-          </a:solidFill>
-          <a:ln w="12700">
-            <a:solidFill>
-              <a:srgbClr val="FF6B6B"/>
-            </a:solidFill>
-          </a:ln>
-        </p:spPr>
-        <p:txBody>
-          <a:bodyPr/>
-          <a:lstStyle/>
-          <a:p>
-            <a:endParaRPr/>
-          </a:p>
-        </p:txBody>
-      </p:sp>
-      <p:sp>
-        <p:nvSpPr>
-          <p:cNvPr id="13" name="TextBox 12"/>
-          <p:cNvSpPr txBox="1"/>
-          <p:nvPr/>
-        </p:nvSpPr>
-        <p:spPr>
-          <a:xfrm>
-            <a:off x="886968" y="2487168"/>
-            <a:ext cx="1280160" cy="182880"/>
-          </a:xfrm>
-          <a:prstGeom prst="rect">
-            <a:avLst/>
-          </a:prstGeom>
-          <a:noFill/>
-        </p:spPr>
-        <p:txBody>
-          <a:bodyPr wrap="square">
-            <a:spAutoFit/>
-          </a:bodyPr>
-          <a:lstStyle/>
-          <a:p>
-            <a:pPr algn="l"/>
-            <a:r>
-              <a:rPr sz="800" b="1" i="0">
-                <a:solidFill>
-                  <a:srgbClr val="FF6B6B"/>
-                </a:solidFill>
-              </a:rPr>
-              <a:t>init_db (Python)</a:t>
-            </a:r>
-          </a:p>
-        </p:txBody>
-      </p:sp>
-      <p:sp>
-        <p:nvSpPr>
-          <p:cNvPr id="14" name="TextBox 13"/>
-          <p:cNvSpPr txBox="1"/>
-          <p:nvPr/>
-        </p:nvSpPr>
-        <p:spPr>
-          <a:xfrm>
-            <a:off x="886968" y="2651760"/>
-            <a:ext cx="1280160" cy="292608"/>
-          </a:xfrm>
-          <a:prstGeom prst="rect">
-            <a:avLst/>
-          </a:prstGeom>
-          <a:noFill/>
-        </p:spPr>
-        <p:txBody>
-          <a:bodyPr wrap="square">
-            <a:spAutoFit/>
-          </a:bodyPr>
-          <a:lstStyle/>
-          <a:p>
-            <a:pPr algn="l"/>
-            <a:r>
-              <a:rPr sz="700" b="0" i="0">
-                <a:solidFill>
-                  <a:srgbClr val="AAAACC"/>
-                </a:solidFill>
-              </a:rPr>
-              <a:t>Crée tables + CDC
-Users SQL Server</a:t>
-            </a:r>
-          </a:p>
-        </p:txBody>
-      </p:sp>
-      <p:sp>
-        <p:nvSpPr>
-          <p:cNvPr id="47" name="rect"/>
-          <p:cNvSpPr>
-            <a:spLocks noGrp="1"/>
-          </p:cNvSpPr>
-          <p:nvPr/>
-        </p:nvSpPr>
-        <p:spPr>
-          <a:xfrm>
-            <a:off x="3246120" y="868680"/>
-            <a:ext cx="2560320" cy="1508760"/>
-          </a:xfrm>
-          <a:prstGeom prst="rect">
-            <a:avLst/>
-          </a:prstGeom>
-          <a:solidFill>
-            <a:srgbClr val="16213E"/>
-          </a:solidFill>
-          <a:ln w="19050">
-            <a:solidFill>
-              <a:srgbClr val="9B59B6"/>
-            </a:solidFill>
-          </a:ln>
-        </p:spPr>
-        <p:txBody>
-          <a:bodyPr/>
-          <a:lstStyle/>
-          <a:p>
-            <a:endParaRPr/>
-          </a:p>
-        </p:txBody>
-      </p:sp>
-      <p:sp>
-        <p:nvSpPr>
-          <p:cNvPr id="15" name="TextBox 14"/>
-          <p:cNvSpPr txBox="1"/>
-          <p:nvPr/>
-        </p:nvSpPr>
-        <p:spPr>
-          <a:xfrm>
-            <a:off x="3337560" y="914400"/>
-            <a:ext cx="2377439" cy="274320"/>
-          </a:xfrm>
-          <a:prstGeom prst="rect">
-            <a:avLst/>
-          </a:prstGeom>
-          <a:noFill/>
-        </p:spPr>
-        <p:txBody>
-          <a:bodyPr wrap="square">
-            <a:spAutoFit/>
-          </a:bodyPr>
-          <a:lstStyle/>
-          <a:p>
-            <a:pPr algn="l"/>
-            <a:r>
-              <a:rPr sz="900" b="1" i="0">
-                <a:solidFill>
-                  <a:srgbClr val="9B59B6"/>
-                </a:solidFill>
-              </a:rPr>
-              <a:t>Docker Compose 2 — Notifications Slack</a:t>
-            </a:r>
-          </a:p>
-        </p:txBody>
-      </p:sp>
-      <p:sp>
-        <p:nvSpPr>
-          <p:cNvPr id="48" name="rect"/>
-          <p:cNvSpPr>
-            <a:spLocks noGrp="1"/>
-          </p:cNvSpPr>
-          <p:nvPr/>
-        </p:nvSpPr>
-        <p:spPr>
-          <a:xfrm>
-            <a:off x="3337560" y="1216152"/>
-            <a:ext cx="1097280" cy="868680"/>
-          </a:xfrm>
-          <a:prstGeom prst="rect">
-            <a:avLst/>
-          </a:prstGeom>
-          <a:solidFill>
-            <a:srgbClr val="0F3460"/>
-          </a:solidFill>
-          <a:ln w="12700">
-            <a:solidFill>
-              <a:srgbClr val="E74C3C"/>
-            </a:solidFill>
-          </a:ln>
-        </p:spPr>
-        <p:txBody>
-          <a:bodyPr/>
-          <a:lstStyle/>
-          <a:p>
-            <a:endParaRPr/>
-          </a:p>
-        </p:txBody>
-      </p:sp>
-      <p:sp>
-        <p:nvSpPr>
-          <p:cNvPr id="16" name="TextBox 15"/>
-          <p:cNvSpPr txBox="1"/>
-          <p:nvPr/>
-        </p:nvSpPr>
-        <p:spPr>
-          <a:xfrm>
-            <a:off x="3355848" y="1234440"/>
-            <a:ext cx="1051560" cy="201168"/>
-          </a:xfrm>
-          <a:prstGeom prst="rect">
-            <a:avLst/>
-          </a:prstGeom>
-          <a:noFill/>
-        </p:spPr>
-        <p:txBody>
-          <a:bodyPr wrap="square">
-            <a:spAutoFit/>
-          </a:bodyPr>
-          <a:lstStyle/>
-          <a:p>
-            <a:pPr algn="l"/>
-            <a:r>
-              <a:rPr sz="800" b="1" i="0">
-                <a:solidFill>
-                  <a:srgbClr val="E74C3C"/>
-                </a:solidFill>
-              </a:rPr>
-              <a:t>Debezium Server</a:t>
-            </a:r>
-          </a:p>
-        </p:txBody>
-      </p:sp>
-      <p:sp>
-        <p:nvSpPr>
-          <p:cNvPr id="17" name="TextBox 16"/>
-          <p:cNvSpPr txBox="1"/>
-          <p:nvPr/>
-        </p:nvSpPr>
-        <p:spPr>
-          <a:xfrm>
-            <a:off x="3355848" y="1435607"/>
-            <a:ext cx="1051560" cy="594360"/>
-          </a:xfrm>
-          <a:prstGeom prst="rect">
-            <a:avLst/>
-          </a:prstGeom>
-          <a:noFill/>
-        </p:spPr>
-        <p:txBody>
-          <a:bodyPr wrap="square">
-            <a:spAutoFit/>
-          </a:bodyPr>
-          <a:lstStyle/>
-          <a:p>
-            <a:pPr algn="l"/>
-            <a:r>
-              <a:rPr sz="700" b="0" i="0">
-                <a:solidFill>
-                  <a:srgbClr val="AAAACC"/>
-                </a:solidFill>
-              </a:rPr>
-              <a:t>CDC→HTTP
-offsets.dat
-snapshot: no_data</a:t>
-            </a:r>
-          </a:p>
-        </p:txBody>
-      </p:sp>
-      <p:sp>
-        <p:nvSpPr>
-          <p:cNvPr id="49" name="rect"/>
-          <p:cNvSpPr>
-            <a:spLocks noGrp="1"/>
-          </p:cNvSpPr>
-          <p:nvPr/>
-        </p:nvSpPr>
-        <p:spPr>
-          <a:xfrm>
-            <a:off x="4572000" y="1216152"/>
-            <a:ext cx="1143000" cy="868680"/>
-          </a:xfrm>
-          <a:prstGeom prst="rect">
-            <a:avLst/>
-          </a:prstGeom>
-          <a:solidFill>
-            <a:srgbClr val="0F3460"/>
-          </a:solidFill>
-          <a:ln w="12700">
-            <a:solidFill>
-              <a:srgbClr val="27AE60"/>
-            </a:solidFill>
-          </a:ln>
-        </p:spPr>
-        <p:txBody>
-          <a:bodyPr/>
-          <a:lstStyle/>
-          <a:p>
-            <a:endParaRPr/>
-          </a:p>
-        </p:txBody>
-      </p:sp>
-      <p:sp>
-        <p:nvSpPr>
-          <p:cNvPr id="18" name="TextBox 17"/>
-          <p:cNvSpPr txBox="1"/>
-          <p:nvPr/>
-        </p:nvSpPr>
-        <p:spPr>
-          <a:xfrm>
-            <a:off x="4590288" y="1234440"/>
-            <a:ext cx="1097280" cy="201168"/>
-          </a:xfrm>
-          <a:prstGeom prst="rect">
-            <a:avLst/>
-          </a:prstGeom>
-          <a:noFill/>
-        </p:spPr>
-        <p:txBody>
-          <a:bodyPr wrap="square">
-            <a:spAutoFit/>
-          </a:bodyPr>
-          <a:lstStyle/>
-          <a:p>
-            <a:pPr algn="l"/>
-            <a:r>
-              <a:rPr sz="800" b="1" i="0">
-                <a:solidFill>
-                  <a:srgbClr val="27AE60"/>
-                </a:solidFill>
-              </a:rPr>
-              <a:t>slack (Flask)</a:t>
-            </a:r>
-          </a:p>
-        </p:txBody>
-      </p:sp>
-      <p:sp>
-        <p:nvSpPr>
-          <p:cNvPr id="19" name="TextBox 18"/>
-          <p:cNvSpPr txBox="1"/>
-          <p:nvPr/>
-        </p:nvSpPr>
-        <p:spPr>
-          <a:xfrm>
-            <a:off x="4590288" y="1435607"/>
-            <a:ext cx="1097280" cy="594360"/>
-          </a:xfrm>
-          <a:prstGeom prst="rect">
-            <a:avLst/>
-          </a:prstGeom>
-          <a:noFill/>
-        </p:spPr>
-        <p:txBody>
-          <a:bodyPr wrap="square">
-            <a:spAutoFit/>
-          </a:bodyPr>
-          <a:lstStyle/>
-          <a:p>
-            <a:pPr algn="l"/>
-            <a:r>
-              <a:rPr sz="700" b="0" i="0">
-                <a:solidFill>
-                  <a:srgbClr val="AAAACC"/>
-                </a:solidFill>
-              </a:rPr>
-              <a:t>port 5000
-Webhook Slack
-Anti-doublons</a:t>
-            </a:r>
-          </a:p>
-        </p:txBody>
-      </p:sp>
-      <p:sp>
-        <p:nvSpPr>
-          <p:cNvPr id="50" name="arrow"/>
-          <p:cNvSpPr>
-            <a:spLocks noGrp="1"/>
-          </p:cNvSpPr>
-          <p:nvPr/>
-        </p:nvSpPr>
-        <p:spPr>
-          <a:xfrm>
-            <a:off x="4434840" y="1645919"/>
-            <a:ext cx="137160" cy="914"/>
-          </a:xfrm>
-          <a:prstGeom prst="straightConnector1">
-            <a:avLst/>
-          </a:prstGeom>
-          <a:noFill/>
-          <a:ln w="25400">
-            <a:solidFill>
-              <a:srgbClr val="9B59B6"/>
-            </a:solidFill>
-            <a:tailEnd type="arrow" w="med" len="med"/>
-          </a:ln>
-        </p:spPr>
-        <p:txBody>
-          <a:bodyPr/>
-          <a:lstStyle/>
-          <a:p>
-            <a:endParaRPr/>
-          </a:p>
-        </p:txBody>
-      </p:sp>
-      <p:sp>
-        <p:nvSpPr>
-          <p:cNvPr id="51" name="rect"/>
-          <p:cNvSpPr>
-            <a:spLocks noGrp="1"/>
-          </p:cNvSpPr>
-          <p:nvPr/>
-        </p:nvSpPr>
-        <p:spPr>
-          <a:xfrm>
-            <a:off x="6035040" y="868680"/>
-            <a:ext cx="2834640" cy="1508760"/>
-          </a:xfrm>
-          <a:prstGeom prst="rect">
-            <a:avLst/>
-          </a:prstGeom>
-          <a:solidFill>
-            <a:srgbClr val="16213E"/>
-          </a:solidFill>
-          <a:ln w="19050">
-            <a:solidFill>
-              <a:srgbClr val="F39C12"/>
-            </a:solidFill>
-          </a:ln>
-        </p:spPr>
-        <p:txBody>
-          <a:bodyPr/>
-          <a:lstStyle/>
-          <a:p>
-            <a:endParaRPr/>
-          </a:p>
-        </p:txBody>
-      </p:sp>
-      <p:sp>
-        <p:nvSpPr>
-          <p:cNvPr id="20" name="TextBox 19"/>
-          <p:cNvSpPr txBox="1"/>
-          <p:nvPr/>
-        </p:nvSpPr>
-        <p:spPr>
-          <a:xfrm>
-            <a:off x="6126479" y="914400"/>
-            <a:ext cx="2651760" cy="274320"/>
-          </a:xfrm>
-          <a:prstGeom prst="rect">
-            <a:avLst/>
-          </a:prstGeom>
-          <a:noFill/>
-        </p:spPr>
-        <p:txBody>
-          <a:bodyPr wrap="square">
-            <a:spAutoFit/>
-          </a:bodyPr>
-          <a:lstStyle/>
-          <a:p>
-            <a:pPr algn="l"/>
-            <a:r>
-              <a:rPr sz="900" b="1" i="0">
-                <a:solidFill>
-                  <a:srgbClr val="F39C12"/>
-                </a:solidFill>
-              </a:rPr>
-              <a:t>Docker Compose 3 — ETL &amp; Primes (Kestra)</a:t>
-            </a:r>
-          </a:p>
-        </p:txBody>
-      </p:sp>
-      <p:sp>
-        <p:nvSpPr>
-          <p:cNvPr id="52" name="rect"/>
-          <p:cNvSpPr>
-            <a:spLocks noGrp="1"/>
-          </p:cNvSpPr>
-          <p:nvPr/>
-        </p:nvSpPr>
-        <p:spPr>
-          <a:xfrm>
-            <a:off x="6126479" y="1216152"/>
-            <a:ext cx="777240" cy="868680"/>
-          </a:xfrm>
-          <a:prstGeom prst="rect">
-            <a:avLst/>
-          </a:prstGeom>
-          <a:solidFill>
-            <a:srgbClr val="0F3460"/>
-          </a:solidFill>
-          <a:ln w="12700">
-            <a:solidFill>
-              <a:srgbClr val="3498DB"/>
-            </a:solidFill>
-          </a:ln>
-        </p:spPr>
-        <p:txBody>
-          <a:bodyPr/>
-          <a:lstStyle/>
-          <a:p>
-            <a:endParaRPr/>
-          </a:p>
-        </p:txBody>
-      </p:sp>
-      <p:sp>
-        <p:nvSpPr>
-          <p:cNvPr id="21" name="TextBox 20"/>
-          <p:cNvSpPr txBox="1"/>
-          <p:nvPr/>
-        </p:nvSpPr>
-        <p:spPr>
-          <a:xfrm>
-            <a:off x="6144768" y="1234440"/>
-            <a:ext cx="731520" cy="201168"/>
-          </a:xfrm>
-          <a:prstGeom prst="rect">
-            <a:avLst/>
-          </a:prstGeom>
-          <a:noFill/>
-        </p:spPr>
-        <p:txBody>
-          <a:bodyPr wrap="square">
-            <a:spAutoFit/>
-          </a:bodyPr>
-          <a:lstStyle/>
-          <a:p>
-            <a:pPr algn="l"/>
-            <a:r>
-              <a:rPr sz="800" b="1" i="0">
-                <a:solidFill>
-                  <a:srgbClr val="3498DB"/>
-                </a:solidFill>
-              </a:rPr>
-              <a:t>extract</a:t>
-            </a:r>
-          </a:p>
-        </p:txBody>
-      </p:sp>
-      <p:sp>
-        <p:nvSpPr>
-          <p:cNvPr id="22" name="TextBox 21"/>
-          <p:cNvSpPr txBox="1"/>
-          <p:nvPr/>
-        </p:nvSpPr>
-        <p:spPr>
-          <a:xfrm>
-            <a:off x="6144768" y="1435607"/>
-            <a:ext cx="731520" cy="594360"/>
-          </a:xfrm>
-          <a:prstGeom prst="rect">
-            <a:avLst/>
-          </a:prstGeom>
-          <a:noFill/>
-        </p:spPr>
-        <p:txBody>
-          <a:bodyPr wrap="square">
-            <a:spAutoFit/>
-          </a:bodyPr>
-          <a:lstStyle/>
-          <a:p>
-            <a:pPr algn="l"/>
-            <a:r>
-              <a:rPr sz="700" b="0" i="0">
-                <a:solidFill>
-                  <a:srgbClr val="AAAACC"/>
-                </a:solidFill>
-              </a:rPr>
-              <a:t>DuckDB
-export CSV</a:t>
-            </a:r>
-          </a:p>
-        </p:txBody>
-      </p:sp>
-      <p:sp>
-        <p:nvSpPr>
-          <p:cNvPr id="53" name="rect"/>
-          <p:cNvSpPr>
-            <a:spLocks noGrp="1"/>
-          </p:cNvSpPr>
-          <p:nvPr/>
-        </p:nvSpPr>
-        <p:spPr>
-          <a:xfrm>
-            <a:off x="6995159" y="1216152"/>
-            <a:ext cx="777240" cy="868680"/>
-          </a:xfrm>
-          <a:prstGeom prst="rect">
-            <a:avLst/>
-          </a:prstGeom>
-          <a:solidFill>
-            <a:srgbClr val="0F3460"/>
-          </a:solidFill>
-          <a:ln w="12700">
-            <a:solidFill>
-              <a:srgbClr val="1ABC9C"/>
-            </a:solidFill>
-          </a:ln>
-        </p:spPr>
-        <p:txBody>
-          <a:bodyPr/>
-          <a:lstStyle/>
-          <a:p>
-            <a:endParaRPr/>
-          </a:p>
-        </p:txBody>
-      </p:sp>
-      <p:sp>
-        <p:nvSpPr>
-          <p:cNvPr id="23" name="TextBox 22"/>
-          <p:cNvSpPr txBox="1"/>
-          <p:nvPr/>
-        </p:nvSpPr>
-        <p:spPr>
-          <a:xfrm>
-            <a:off x="7013448" y="1234440"/>
-            <a:ext cx="731520" cy="201168"/>
-          </a:xfrm>
-          <a:prstGeom prst="rect">
-            <a:avLst/>
-          </a:prstGeom>
-          <a:noFill/>
-        </p:spPr>
-        <p:txBody>
-          <a:bodyPr wrap="square">
-            <a:spAutoFit/>
-          </a:bodyPr>
-          <a:lstStyle/>
-          <a:p>
-            <a:pPr algn="l"/>
-            <a:r>
-              <a:rPr sz="800" b="1" i="0">
-                <a:solidFill>
-                  <a:srgbClr val="1ABC9C"/>
-                </a:solidFill>
-              </a:rPr>
-              <a:t>test</a:t>
-            </a:r>
-          </a:p>
-        </p:txBody>
-      </p:sp>
-      <p:sp>
-        <p:nvSpPr>
-          <p:cNvPr id="24" name="TextBox 23"/>
-          <p:cNvSpPr txBox="1"/>
-          <p:nvPr/>
-        </p:nvSpPr>
-        <p:spPr>
-          <a:xfrm>
-            <a:off x="7013448" y="1435607"/>
-            <a:ext cx="731520" cy="594360"/>
-          </a:xfrm>
-          <a:prstGeom prst="rect">
-            <a:avLst/>
-          </a:prstGeom>
-          <a:noFill/>
-        </p:spPr>
-        <p:txBody>
-          <a:bodyPr wrap="square">
-            <a:spAutoFit/>
-          </a:bodyPr>
-          <a:lstStyle/>
-          <a:p>
-            <a:pPr algn="l"/>
-            <a:r>
-              <a:rPr sz="700" b="0" i="0">
-                <a:solidFill>
-                  <a:srgbClr val="AAAACC"/>
-                </a:solidFill>
-              </a:rPr>
-              <a:t>Validation
-données</a:t>
-            </a:r>
-          </a:p>
-        </p:txBody>
-      </p:sp>
-      <p:sp>
-        <p:nvSpPr>
-          <p:cNvPr id="54" name="rect"/>
-          <p:cNvSpPr>
-            <a:spLocks noGrp="1"/>
-          </p:cNvSpPr>
-          <p:nvPr/>
-        </p:nvSpPr>
-        <p:spPr>
-          <a:xfrm>
-            <a:off x="7863840" y="1216152"/>
-            <a:ext cx="868680" cy="868680"/>
-          </a:xfrm>
-          <a:prstGeom prst="rect">
-            <a:avLst/>
-          </a:prstGeom>
-          <a:solidFill>
-            <a:srgbClr val="0F3460"/>
-          </a:solidFill>
-          <a:ln w="12700">
-            <a:solidFill>
-              <a:srgbClr val="E67E22"/>
-            </a:solidFill>
-          </a:ln>
-        </p:spPr>
-        <p:txBody>
-          <a:bodyPr/>
-          <a:lstStyle/>
-          <a:p>
-            <a:endParaRPr/>
-          </a:p>
-        </p:txBody>
-      </p:sp>
-      <p:sp>
-        <p:nvSpPr>
-          <p:cNvPr id="25" name="TextBox 24"/>
-          <p:cNvSpPr txBox="1"/>
-          <p:nvPr/>
-        </p:nvSpPr>
-        <p:spPr>
-          <a:xfrm>
-            <a:off x="7882127" y="1234440"/>
-            <a:ext cx="822960" cy="201168"/>
-          </a:xfrm>
-          <a:prstGeom prst="rect">
-            <a:avLst/>
-          </a:prstGeom>
-          <a:noFill/>
-        </p:spPr>
-        <p:txBody>
-          <a:bodyPr wrap="square">
-            <a:spAutoFit/>
-          </a:bodyPr>
-          <a:lstStyle/>
-          <a:p>
-            <a:pPr algn="l"/>
-            <a:r>
-              <a:rPr sz="800" b="1" i="0">
-                <a:solidFill>
-                  <a:srgbClr val="E67E22"/>
-                </a:solidFill>
-              </a:rPr>
-              <a:t>transfert</a:t>
-            </a:r>
-          </a:p>
-        </p:txBody>
-      </p:sp>
-      <p:sp>
-        <p:nvSpPr>
-          <p:cNvPr id="26" name="TextBox 25"/>
-          <p:cNvSpPr txBox="1"/>
-          <p:nvPr/>
-        </p:nvSpPr>
-        <p:spPr>
-          <a:xfrm>
-            <a:off x="7882127" y="1435607"/>
-            <a:ext cx="822960" cy="594360"/>
-          </a:xfrm>
-          <a:prstGeom prst="rect">
-            <a:avLst/>
-          </a:prstGeom>
-          <a:noFill/>
-        </p:spPr>
-        <p:txBody>
-          <a:bodyPr wrap="square">
-            <a:spAutoFit/>
-          </a:bodyPr>
-          <a:lstStyle/>
-          <a:p>
-            <a:pPr algn="l"/>
-            <a:r>
-              <a:rPr sz="700" b="0" i="0">
-                <a:solidFill>
-                  <a:srgbClr val="AAAACC"/>
-                </a:solidFill>
-              </a:rPr>
-              <a:t>SQL Server
-→ PowerBI</a:t>
-            </a:r>
-          </a:p>
-        </p:txBody>
-      </p:sp>
-      <p:sp>
-        <p:nvSpPr>
-          <p:cNvPr id="55" name="arrow"/>
-          <p:cNvSpPr>
-            <a:spLocks noGrp="1"/>
-          </p:cNvSpPr>
-          <p:nvPr/>
-        </p:nvSpPr>
-        <p:spPr>
-          <a:xfrm>
-            <a:off x="6903720" y="1645919"/>
-            <a:ext cx="91439" cy="914"/>
-          </a:xfrm>
-          <a:prstGeom prst="straightConnector1">
-            <a:avLst/>
-          </a:prstGeom>
-          <a:noFill/>
-          <a:ln w="19050">
-            <a:solidFill>
-              <a:srgbClr val="F39C12"/>
-            </a:solidFill>
-            <a:tailEnd type="arrow" w="med" len="med"/>
-          </a:ln>
-        </p:spPr>
-        <p:txBody>
-          <a:bodyPr/>
-          <a:lstStyle/>
-          <a:p>
-            <a:endParaRPr/>
-          </a:p>
-        </p:txBody>
-      </p:sp>
-      <p:sp>
-        <p:nvSpPr>
-          <p:cNvPr id="56" name="arrow"/>
-          <p:cNvSpPr>
-            <a:spLocks noGrp="1"/>
-          </p:cNvSpPr>
-          <p:nvPr/>
-        </p:nvSpPr>
-        <p:spPr>
-          <a:xfrm>
-            <a:off x="7772400" y="1645919"/>
-            <a:ext cx="91439" cy="914"/>
-          </a:xfrm>
-          <a:prstGeom prst="straightConnector1">
-            <a:avLst/>
-          </a:prstGeom>
-          <a:noFill/>
-          <a:ln w="19050">
-            <a:solidFill>
-              <a:srgbClr val="F39C12"/>
-            </a:solidFill>
-            <a:tailEnd type="arrow" w="med" len="med"/>
-          </a:ln>
-        </p:spPr>
-        <p:txBody>
-          <a:bodyPr/>
-          <a:lstStyle/>
-          <a:p>
-            <a:endParaRPr/>
-          </a:p>
-        </p:txBody>
-      </p:sp>
-      <p:sp>
-        <p:nvSpPr>
-          <p:cNvPr id="57" name="rect"/>
-          <p:cNvSpPr>
-            <a:spLocks noGrp="1"/>
-          </p:cNvSpPr>
-          <p:nvPr/>
-        </p:nvSpPr>
-        <p:spPr>
-          <a:xfrm>
-            <a:off x="3246120" y="2514600"/>
-            <a:ext cx="2560320" cy="1234440"/>
-          </a:xfrm>
-          <a:prstGeom prst="rect">
-            <a:avLst/>
-          </a:prstGeom>
-          <a:solidFill>
-            <a:srgbClr val="16213E"/>
-          </a:solidFill>
-          <a:ln w="19050">
-            <a:solidFill>
-              <a:srgbClr val="2ECC71"/>
-            </a:solidFill>
-          </a:ln>
-        </p:spPr>
-        <p:txBody>
-          <a:bodyPr/>
-          <a:lstStyle/>
-          <a:p>
-            <a:endParaRPr/>
-          </a:p>
-        </p:txBody>
-      </p:sp>
-      <p:sp>
-        <p:nvSpPr>
-          <p:cNvPr id="27" name="TextBox 26"/>
-          <p:cNvSpPr txBox="1"/>
-          <p:nvPr/>
-        </p:nvSpPr>
-        <p:spPr>
-          <a:xfrm>
-            <a:off x="3337560" y="2560320"/>
-            <a:ext cx="2377439" cy="274320"/>
-          </a:xfrm>
-          <a:prstGeom prst="rect">
-            <a:avLst/>
-          </a:prstGeom>
-          <a:noFill/>
-        </p:spPr>
-        <p:txBody>
-          <a:bodyPr wrap="square">
-            <a:spAutoFit/>
-          </a:bodyPr>
-          <a:lstStyle/>
-          <a:p>
-            <a:pPr algn="l"/>
-            <a:r>
-              <a:rPr sz="900" b="1" i="0">
-                <a:solidFill>
-                  <a:srgbClr val="2ECC71"/>
-                </a:solidFill>
-              </a:rPr>
-              <a:t>Kestra 1.3.3 — Orchestration</a:t>
-            </a:r>
-          </a:p>
-        </p:txBody>
-      </p:sp>
-      <p:sp>
-        <p:nvSpPr>
-          <p:cNvPr id="58" name="rect"/>
-          <p:cNvSpPr>
-            <a:spLocks noGrp="1"/>
-          </p:cNvSpPr>
-          <p:nvPr/>
-        </p:nvSpPr>
-        <p:spPr>
-          <a:xfrm>
-            <a:off x="3337560" y="2862072"/>
-            <a:ext cx="1051560" cy="685800"/>
-          </a:xfrm>
-          <a:prstGeom prst="rect">
-            <a:avLst/>
-          </a:prstGeom>
-          <a:solidFill>
-            <a:srgbClr val="0F3460"/>
-          </a:solidFill>
-          <a:ln w="12700">
-            <a:solidFill>
-              <a:srgbClr val="2ECC71"/>
-            </a:solidFill>
-          </a:ln>
-        </p:spPr>
-        <p:txBody>
-          <a:bodyPr/>
-          <a:lstStyle/>
-          <a:p>
-            <a:endParaRPr/>
-          </a:p>
-        </p:txBody>
-      </p:sp>
-      <p:sp>
-        <p:nvSpPr>
-          <p:cNvPr id="28" name="TextBox 27"/>
-          <p:cNvSpPr txBox="1"/>
-          <p:nvPr/>
-        </p:nvSpPr>
-        <p:spPr>
-          <a:xfrm>
-            <a:off x="3355848" y="2880360"/>
-            <a:ext cx="1005840" cy="182880"/>
-          </a:xfrm>
-          <a:prstGeom prst="rect">
-            <a:avLst/>
-          </a:prstGeom>
-          <a:noFill/>
-        </p:spPr>
-        <p:txBody>
-          <a:bodyPr wrap="square">
-            <a:spAutoFit/>
-          </a:bodyPr>
-          <a:lstStyle/>
-          <a:p>
-            <a:pPr algn="l"/>
-            <a:r>
-              <a:rPr sz="800" b="1" i="0">
-                <a:solidFill>
-                  <a:srgbClr val="2ECC71"/>
-                </a:solidFill>
-              </a:rPr>
-              <a:t>flow_getdata</a:t>
-            </a:r>
-          </a:p>
-        </p:txBody>
-      </p:sp>
-      <p:sp>
-        <p:nvSpPr>
-          <p:cNvPr id="29" name="TextBox 28"/>
-          <p:cNvSpPr txBox="1"/>
-          <p:nvPr/>
-        </p:nvSpPr>
-        <p:spPr>
-          <a:xfrm>
-            <a:off x="3355848" y="3063240"/>
-            <a:ext cx="1005840" cy="457200"/>
-          </a:xfrm>
-          <a:prstGeom prst="rect">
-            <a:avLst/>
-          </a:prstGeom>
-          <a:noFill/>
-        </p:spPr>
-        <p:txBody>
-          <a:bodyPr wrap="square">
-            <a:spAutoFit/>
-          </a:bodyPr>
-          <a:lstStyle/>
-          <a:p>
-            <a:pPr algn="l"/>
-            <a:r>
-              <a:rPr sz="700" b="0" i="0">
-                <a:solidFill>
-                  <a:srgbClr val="AAAACC"/>
-                </a:solidFill>
-              </a:rPr>
-              <a:t>*/2 * * * *
-Sync activités</a:t>
-            </a:r>
-          </a:p>
-        </p:txBody>
-      </p:sp>
-      <p:sp>
-        <p:nvSpPr>
-          <p:cNvPr id="59" name="rect"/>
-          <p:cNvSpPr>
-            <a:spLocks noGrp="1"/>
-          </p:cNvSpPr>
-          <p:nvPr/>
-        </p:nvSpPr>
-        <p:spPr>
-          <a:xfrm>
-            <a:off x="4526279" y="2862072"/>
-            <a:ext cx="1143000" cy="685800"/>
-          </a:xfrm>
-          <a:prstGeom prst="rect">
-            <a:avLst/>
-          </a:prstGeom>
-          <a:solidFill>
-            <a:srgbClr val="0F3460"/>
-          </a:solidFill>
-          <a:ln w="12700">
-            <a:solidFill>
-              <a:srgbClr val="2ECC71"/>
-            </a:solidFill>
-          </a:ln>
-        </p:spPr>
-        <p:txBody>
-          <a:bodyPr/>
-          <a:lstStyle/>
-          <a:p>
-            <a:endParaRPr/>
-          </a:p>
-        </p:txBody>
-      </p:sp>
-      <p:sp>
-        <p:nvSpPr>
-          <p:cNvPr id="30" name="TextBox 29"/>
-          <p:cNvSpPr txBox="1"/>
-          <p:nvPr/>
-        </p:nvSpPr>
-        <p:spPr>
-          <a:xfrm>
-            <a:off x="4544568" y="2880360"/>
-            <a:ext cx="1097280" cy="182880"/>
-          </a:xfrm>
-          <a:prstGeom prst="rect">
-            <a:avLst/>
-          </a:prstGeom>
-          <a:noFill/>
-        </p:spPr>
-        <p:txBody>
-          <a:bodyPr wrap="square">
-            <a:spAutoFit/>
-          </a:bodyPr>
-          <a:lstStyle/>
-          <a:p>
-            <a:pPr algn="l"/>
-            <a:r>
-              <a:rPr sz="800" b="1" i="0">
-                <a:solidFill>
-                  <a:srgbClr val="2ECC71"/>
-                </a:solidFill>
-              </a:rPr>
-              <a:t>flow_etl_primes</a:t>
-            </a:r>
-          </a:p>
-        </p:txBody>
-      </p:sp>
-      <p:sp>
-        <p:nvSpPr>
-          <p:cNvPr id="31" name="TextBox 30"/>
-          <p:cNvSpPr txBox="1"/>
-          <p:nvPr/>
-        </p:nvSpPr>
-        <p:spPr>
-          <a:xfrm>
-            <a:off x="4544568" y="3063240"/>
-            <a:ext cx="1097280" cy="457200"/>
-          </a:xfrm>
-          <a:prstGeom prst="rect">
-            <a:avLst/>
-          </a:prstGeom>
-          <a:noFill/>
-        </p:spPr>
-        <p:txBody>
-          <a:bodyPr wrap="square">
-            <a:spAutoFit/>
-          </a:bodyPr>
-          <a:lstStyle/>
-          <a:p>
-            <a:pPr algn="l"/>
-            <a:r>
-              <a:rPr sz="700" b="0" i="0">
-                <a:solidFill>
-                  <a:srgbClr val="AAAACC"/>
-                </a:solidFill>
-              </a:rPr>
-              <a:t>1x/mois
-ETL + primes</a:t>
-            </a:r>
-          </a:p>
-        </p:txBody>
-      </p:sp>
-      <p:sp>
-        <p:nvSpPr>
-          <p:cNvPr id="60" name="rect"/>
-          <p:cNvSpPr>
-            <a:spLocks noGrp="1"/>
-          </p:cNvSpPr>
-          <p:nvPr/>
-        </p:nvSpPr>
-        <p:spPr>
-          <a:xfrm>
-            <a:off x="6035040" y="2514600"/>
-            <a:ext cx="2834640" cy="1234440"/>
-          </a:xfrm>
-          <a:prstGeom prst="rect">
-            <a:avLst/>
-          </a:prstGeom>
-          <a:solidFill>
-            <a:srgbClr val="16213E"/>
-          </a:solidFill>
-          <a:ln w="19050">
-            <a:solidFill>
-              <a:srgbClr val="F1C40F"/>
-            </a:solidFill>
-          </a:ln>
-        </p:spPr>
-        <p:txBody>
-          <a:bodyPr/>
-          <a:lstStyle/>
-          <a:p>
-            <a:endParaRPr/>
-          </a:p>
-        </p:txBody>
-      </p:sp>
-      <p:sp>
-        <p:nvSpPr>
-          <p:cNvPr id="32" name="TextBox 31"/>
-          <p:cNvSpPr txBox="1"/>
-          <p:nvPr/>
-        </p:nvSpPr>
-        <p:spPr>
-          <a:xfrm>
-            <a:off x="6126479" y="2560320"/>
-            <a:ext cx="2651760" cy="274320"/>
-          </a:xfrm>
-          <a:prstGeom prst="rect">
-            <a:avLst/>
-          </a:prstGeom>
-          <a:noFill/>
-        </p:spPr>
-        <p:txBody>
-          <a:bodyPr wrap="square">
-            <a:spAutoFit/>
-          </a:bodyPr>
-          <a:lstStyle/>
-          <a:p>
-            <a:pPr algn="l"/>
-            <a:r>
-              <a:rPr sz="900" b="1" i="0">
-                <a:solidFill>
-                  <a:srgbClr val="F1C40F"/>
-                </a:solidFill>
-              </a:rPr>
-              <a:t>Power BI Desktop</a:t>
-            </a:r>
-          </a:p>
-        </p:txBody>
-      </p:sp>
-      <p:sp>
-        <p:nvSpPr>
-          <p:cNvPr id="61" name="rect"/>
-          <p:cNvSpPr>
-            <a:spLocks noGrp="1"/>
-          </p:cNvSpPr>
-          <p:nvPr/>
-        </p:nvSpPr>
-        <p:spPr>
-          <a:xfrm>
-            <a:off x="6126479" y="2862072"/>
-            <a:ext cx="1234440" cy="685800"/>
-          </a:xfrm>
-          <a:prstGeom prst="rect">
-            <a:avLst/>
-          </a:prstGeom>
-          <a:solidFill>
-            <a:srgbClr val="0F3460"/>
-          </a:solidFill>
-          <a:ln w="12700">
-            <a:solidFill>
-              <a:srgbClr val="F1C40F"/>
-            </a:solidFill>
-          </a:ln>
-        </p:spPr>
-        <p:txBody>
-          <a:bodyPr/>
-          <a:lstStyle/>
-          <a:p>
-            <a:endParaRPr/>
-          </a:p>
-        </p:txBody>
-      </p:sp>
-      <p:sp>
-        <p:nvSpPr>
-          <p:cNvPr id="33" name="TextBox 32"/>
-          <p:cNvSpPr txBox="1"/>
-          <p:nvPr/>
-        </p:nvSpPr>
-        <p:spPr>
-          <a:xfrm>
-            <a:off x="6144768" y="2880360"/>
-            <a:ext cx="1188720" cy="182880"/>
-          </a:xfrm>
-          <a:prstGeom prst="rect">
-            <a:avLst/>
-          </a:prstGeom>
-          <a:noFill/>
-        </p:spPr>
-        <p:txBody>
-          <a:bodyPr wrap="square">
-            <a:spAutoFit/>
-          </a:bodyPr>
-          <a:lstStyle/>
-          <a:p>
-            <a:pPr algn="l"/>
-            <a:r>
-              <a:rPr sz="800" b="1" i="0">
-                <a:solidFill>
-                  <a:srgbClr val="F1C40F"/>
-                </a:solidFill>
-              </a:rPr>
-              <a:t>Vue RH</a:t>
-            </a:r>
-          </a:p>
-        </p:txBody>
-      </p:sp>
-      <p:sp>
-        <p:nvSpPr>
-          <p:cNvPr id="34" name="TextBox 33"/>
-          <p:cNvSpPr txBox="1"/>
-          <p:nvPr/>
-        </p:nvSpPr>
-        <p:spPr>
-          <a:xfrm>
-            <a:off x="6144768" y="3063240"/>
-            <a:ext cx="1188720" cy="457200"/>
-          </a:xfrm>
-          <a:prstGeom prst="rect">
-            <a:avLst/>
-          </a:prstGeom>
-          <a:noFill/>
-        </p:spPr>
-        <p:txBody>
-          <a:bodyPr wrap="square">
-            <a:spAutoFit/>
-          </a:bodyPr>
-          <a:lstStyle/>
-          <a:p>
-            <a:pPr algn="l"/>
-            <a:r>
-              <a:rPr sz="700" b="0" i="0">
-                <a:solidFill>
-                  <a:srgbClr val="AAAACC"/>
-                </a:solidFill>
-              </a:rPr>
-              <a:t>TDB + Trajet
-5J + Activités</a:t>
-            </a:r>
-          </a:p>
-        </p:txBody>
-      </p:sp>
-      <p:sp>
-        <p:nvSpPr>
-          <p:cNvPr id="62" name="rect"/>
-          <p:cNvSpPr>
-            <a:spLocks noGrp="1"/>
-          </p:cNvSpPr>
-          <p:nvPr/>
-        </p:nvSpPr>
-        <p:spPr>
-          <a:xfrm>
-            <a:off x="7498079" y="2862072"/>
-            <a:ext cx="1234440" cy="685800"/>
-          </a:xfrm>
-          <a:prstGeom prst="rect">
-            <a:avLst/>
-          </a:prstGeom>
-          <a:solidFill>
-            <a:srgbClr val="0F3460"/>
-          </a:solidFill>
-          <a:ln w="12700">
-            <a:solidFill>
-              <a:srgbClr val="F1C40F"/>
-            </a:solidFill>
-          </a:ln>
-        </p:spPr>
-        <p:txBody>
-          <a:bodyPr/>
-          <a:lstStyle/>
-          <a:p>
-            <a:endParaRPr/>
-          </a:p>
-        </p:txBody>
-      </p:sp>
-      <p:sp>
-        <p:nvSpPr>
-          <p:cNvPr id="35" name="TextBox 34"/>
-          <p:cNvSpPr txBox="1"/>
-          <p:nvPr/>
-        </p:nvSpPr>
-        <p:spPr>
-          <a:xfrm>
-            <a:off x="7516367" y="2880360"/>
-            <a:ext cx="1188720" cy="182880"/>
-          </a:xfrm>
-          <a:prstGeom prst="rect">
-            <a:avLst/>
-          </a:prstGeom>
-          <a:noFill/>
-        </p:spPr>
-        <p:txBody>
-          <a:bodyPr wrap="square">
-            <a:spAutoFit/>
-          </a:bodyPr>
-          <a:lstStyle/>
-          <a:p>
-            <a:pPr algn="l"/>
-            <a:r>
-              <a:rPr sz="800" b="1" i="0">
-                <a:solidFill>
-                  <a:srgbClr val="F1C40F"/>
-                </a:solidFill>
-              </a:rPr>
-              <a:t>Vue Employé</a:t>
-            </a:r>
-          </a:p>
-        </p:txBody>
-      </p:sp>
-      <p:sp>
-        <p:nvSpPr>
-          <p:cNvPr id="36" name="TextBox 35"/>
-          <p:cNvSpPr txBox="1"/>
-          <p:nvPr/>
-        </p:nvSpPr>
-        <p:spPr>
-          <a:xfrm>
-            <a:off x="7516367" y="3063240"/>
-            <a:ext cx="1188720" cy="457200"/>
-          </a:xfrm>
-          <a:prstGeom prst="rect">
-            <a:avLst/>
-          </a:prstGeom>
-          <a:noFill/>
-        </p:spPr>
-        <p:txBody>
-          <a:bodyPr wrap="square">
-            <a:spAutoFit/>
-          </a:bodyPr>
-          <a:lstStyle/>
-          <a:p>
-            <a:pPr algn="l"/>
-            <a:r>
-              <a:rPr sz="700" b="0" i="0">
-                <a:solidFill>
-                  <a:srgbClr val="AAAACC"/>
-                </a:solidFill>
-              </a:rPr>
-              <a:t>Mon TDB
-Mes activités</a:t>
-            </a:r>
-          </a:p>
-        </p:txBody>
-      </p:sp>
-      <p:sp>
-        <p:nvSpPr>
-          <p:cNvPr id="63" name="arrow"/>
-          <p:cNvSpPr>
-            <a:spLocks noGrp="1"/>
-          </p:cNvSpPr>
-          <p:nvPr/>
-        </p:nvSpPr>
-        <p:spPr>
-          <a:xfrm>
-            <a:off x="2971800" y="1463040"/>
-            <a:ext cx="274319" cy="914"/>
-          </a:xfrm>
-          <a:prstGeom prst="straightConnector1">
-            <a:avLst/>
-          </a:prstGeom>
-          <a:noFill/>
-          <a:ln w="25400">
-            <a:solidFill>
-              <a:srgbClr val="FC4C02"/>
-            </a:solidFill>
-            <a:tailEnd type="arrow" w="med" len="med"/>
-          </a:ln>
-        </p:spPr>
-        <p:txBody>
-          <a:bodyPr/>
-          <a:lstStyle/>
-          <a:p>
-            <a:endParaRPr/>
-          </a:p>
-        </p:txBody>
-      </p:sp>
-      <p:sp>
-        <p:nvSpPr>
-          <p:cNvPr id="64" name="arrow"/>
-          <p:cNvSpPr>
-            <a:spLocks noGrp="1"/>
-          </p:cNvSpPr>
-          <p:nvPr/>
-        </p:nvSpPr>
-        <p:spPr>
-          <a:xfrm>
-            <a:off x="5806440" y="1645919"/>
-            <a:ext cx="274319" cy="914"/>
-          </a:xfrm>
-          <a:prstGeom prst="straightConnector1">
-            <a:avLst/>
-          </a:prstGeom>
-          <a:noFill/>
-          <a:ln w="25400">
-            <a:solidFill>
-              <a:srgbClr val="27AE60"/>
-            </a:solidFill>
-            <a:tailEnd type="arrow" w="med" len="med"/>
-          </a:ln>
-        </p:spPr>
-        <p:txBody>
-          <a:bodyPr/>
-          <a:lstStyle/>
-          <a:p>
-            <a:endParaRPr/>
-          </a:p>
-        </p:txBody>
-      </p:sp>
-      <p:sp>
-        <p:nvSpPr>
-          <p:cNvPr id="37" name="TextBox 36"/>
-          <p:cNvSpPr txBox="1"/>
-          <p:nvPr/>
-        </p:nvSpPr>
-        <p:spPr>
-          <a:xfrm>
-            <a:off x="5806440" y="1463040"/>
-            <a:ext cx="502920" cy="228600"/>
-          </a:xfrm>
-          <a:prstGeom prst="rect">
-            <a:avLst/>
-          </a:prstGeom>
-          <a:noFill/>
-        </p:spPr>
-        <p:txBody>
-          <a:bodyPr wrap="square">
-            <a:spAutoFit/>
-          </a:bodyPr>
-          <a:lstStyle/>
-          <a:p>
-            <a:pPr algn="l"/>
-            <a:r>
-              <a:rPr sz="800" b="1" i="0">
-                <a:solidFill>
-                  <a:srgbClr val="27AE60"/>
-                </a:solidFill>
-              </a:rPr>
-              <a:t>Slack</a:t>
-            </a:r>
-          </a:p>
-        </p:txBody>
-      </p:sp>
-      <p:sp>
-        <p:nvSpPr>
-          <p:cNvPr id="65" name="arrow"/>
-          <p:cNvSpPr>
-            <a:spLocks noGrp="1"/>
-          </p:cNvSpPr>
-          <p:nvPr/>
-        </p:nvSpPr>
-        <p:spPr>
-          <a:xfrm>
-            <a:off x="3858768" y="2514600"/>
-            <a:ext cx="914" cy="731519"/>
-          </a:xfrm>
-          <a:prstGeom prst="straightConnector1">
-            <a:avLst/>
-          </a:prstGeom>
-          <a:noFill/>
-          <a:ln w="19050">
-            <a:solidFill>
-              <a:srgbClr val="2ECC71"/>
-            </a:solidFill>
-            <a:tailEnd type="arrow" w="med" len="med"/>
-          </a:ln>
-        </p:spPr>
-        <p:txBody>
-          <a:bodyPr/>
-          <a:lstStyle/>
-          <a:p>
-            <a:endParaRPr/>
-          </a:p>
-        </p:txBody>
-      </p:sp>
-      <p:sp>
-        <p:nvSpPr>
-          <p:cNvPr id="66" name="arrow"/>
-          <p:cNvSpPr>
-            <a:spLocks noGrp="1"/>
-          </p:cNvSpPr>
-          <p:nvPr/>
-        </p:nvSpPr>
-        <p:spPr>
-          <a:xfrm flipV="1">
-            <a:off x="5806440" y="2377439"/>
-            <a:ext cx="228600" cy="749808"/>
-          </a:xfrm>
-          <a:prstGeom prst="straightConnector1">
-            <a:avLst/>
-          </a:prstGeom>
-          <a:noFill/>
-          <a:ln w="19050">
-            <a:solidFill>
-              <a:srgbClr val="2ECC71"/>
-            </a:solidFill>
-            <a:tailEnd type="arrow" w="med" len="med"/>
-          </a:ln>
-        </p:spPr>
-        <p:txBody>
-          <a:bodyPr/>
-          <a:lstStyle/>
-          <a:p>
-            <a:endParaRPr/>
-          </a:p>
-        </p:txBody>
-      </p:sp>
-      <p:sp>
-        <p:nvSpPr>
-          <p:cNvPr id="67" name="arrow"/>
-          <p:cNvSpPr>
-            <a:spLocks noGrp="1"/>
-          </p:cNvSpPr>
-          <p:nvPr/>
-        </p:nvSpPr>
-        <p:spPr>
-          <a:xfrm>
-            <a:off x="7452360" y="2377439"/>
-            <a:ext cx="914" cy="137160"/>
-          </a:xfrm>
-          <a:prstGeom prst="straightConnector1">
-            <a:avLst/>
-          </a:prstGeom>
-          <a:noFill/>
-          <a:ln w="25400">
-            <a:solidFill>
-              <a:srgbClr val="F39C12"/>
-            </a:solidFill>
-            <a:tailEnd type="arrow" w="med" len="med"/>
-          </a:ln>
-        </p:spPr>
-        <p:txBody>
-          <a:bodyPr/>
-          <a:lstStyle/>
-          <a:p>
-            <a:endParaRPr/>
-          </a:p>
-        </p:txBody>
-      </p:sp>
-      <p:sp>
-        <p:nvSpPr>
-          <p:cNvPr id="68" name="rect"/>
-          <p:cNvSpPr>
-            <a:spLocks noGrp="1"/>
-          </p:cNvSpPr>
-          <p:nvPr/>
-        </p:nvSpPr>
-        <p:spPr>
-          <a:xfrm>
-            <a:off x="228600" y="4160520"/>
-            <a:ext cx="1463040" cy="640080"/>
-          </a:xfrm>
-          <a:prstGeom prst="rect">
-            <a:avLst/>
-          </a:prstGeom>
-          <a:solidFill>
-            <a:srgbClr val="FC4C02"/>
-          </a:solidFill>
-          <a:ln>
-            <a:noFill/>
-          </a:ln>
-        </p:spPr>
-        <p:txBody>
-          <a:bodyPr/>
-          <a:lstStyle/>
-          <a:p>
-            <a:endParaRPr/>
-          </a:p>
-        </p:txBody>
-      </p:sp>
-      <p:sp>
-        <p:nvSpPr>
-          <p:cNvPr id="38" name="TextBox 37"/>
-          <p:cNvSpPr txBox="1"/>
-          <p:nvPr/>
-        </p:nvSpPr>
-        <p:spPr>
-          <a:xfrm>
-            <a:off x="274320" y="4224528"/>
-            <a:ext cx="1371600" cy="457200"/>
-          </a:xfrm>
-          <a:prstGeom prst="rect">
-            <a:avLst/>
-          </a:prstGeom>
-          <a:noFill/>
-        </p:spPr>
-        <p:txBody>
-          <a:bodyPr wrap="square">
-            <a:spAutoFit/>
-          </a:bodyPr>
-          <a:lstStyle/>
-          <a:p>
-            <a:pPr algn="ctr"/>
-            <a:r>
-              <a:rPr sz="900" b="1" i="0">
-                <a:solidFill>
-                  <a:srgbClr val="FFFFFF"/>
-                </a:solidFill>
-              </a:rPr>
-              <a:t>Strava API
-(externe)</a:t>
-            </a:r>
-          </a:p>
-        </p:txBody>
-      </p:sp>
-      <p:sp>
-        <p:nvSpPr>
-          <p:cNvPr id="69" name="rect"/>
-          <p:cNvSpPr>
-            <a:spLocks noGrp="1"/>
-          </p:cNvSpPr>
-          <p:nvPr/>
-        </p:nvSpPr>
-        <p:spPr>
-          <a:xfrm>
-            <a:off x="1965960" y="4160520"/>
-            <a:ext cx="1463040" cy="640080"/>
-          </a:xfrm>
-          <a:prstGeom prst="rect">
-            <a:avLst/>
-          </a:prstGeom>
-          <a:solidFill>
-            <a:srgbClr val="34495E"/>
-          </a:solidFill>
-          <a:ln w="12700">
-            <a:solidFill>
-              <a:srgbClr val="AAAACC"/>
-            </a:solidFill>
-          </a:ln>
-        </p:spPr>
-        <p:txBody>
-          <a:bodyPr/>
-          <a:lstStyle/>
-          <a:p>
-            <a:endParaRPr/>
-          </a:p>
-        </p:txBody>
-      </p:sp>
-      <p:sp>
-        <p:nvSpPr>
-          <p:cNvPr id="39" name="TextBox 38"/>
-          <p:cNvSpPr txBox="1"/>
-          <p:nvPr/>
-        </p:nvSpPr>
-        <p:spPr>
-          <a:xfrm>
-            <a:off x="2011680" y="4224528"/>
-            <a:ext cx="1371600" cy="457200"/>
-          </a:xfrm>
-          <a:prstGeom prst="rect">
-            <a:avLst/>
-          </a:prstGeom>
-          <a:noFill/>
-        </p:spPr>
-        <p:txBody>
-          <a:bodyPr wrap="square">
-            <a:spAutoFit/>
-          </a:bodyPr>
-          <a:lstStyle/>
-          <a:p>
-            <a:pPr algn="ctr"/>
-            <a:r>
-              <a:rPr sz="800" b="0" i="0">
-                <a:solidFill>
-                  <a:srgbClr val="CCCCEE"/>
-                </a:solidFill>
-              </a:rPr>
-              <a:t>Google Maps
-API (validation)</a:t>
-            </a:r>
-          </a:p>
-        </p:txBody>
-      </p:sp>
-      <p:sp>
-        <p:nvSpPr>
-          <p:cNvPr id="70" name="arrow"/>
-          <p:cNvSpPr>
-            <a:spLocks noGrp="1"/>
-          </p:cNvSpPr>
-          <p:nvPr/>
-        </p:nvSpPr>
-        <p:spPr>
-          <a:xfrm>
-            <a:off x="777240" y="3246120"/>
-            <a:ext cx="914" cy="914400"/>
-          </a:xfrm>
-          <a:prstGeom prst="straightConnector1">
-            <a:avLst/>
-          </a:prstGeom>
-          <a:noFill/>
-          <a:ln w="19050">
-            <a:solidFill>
-              <a:srgbClr val="FC4C02"/>
-            </a:solidFill>
-            <a:tailEnd type="arrow" w="med" len="med"/>
-          </a:ln>
-        </p:spPr>
-        <p:txBody>
-          <a:bodyPr/>
-          <a:lstStyle/>
-          <a:p>
-            <a:endParaRPr/>
-          </a:p>
-        </p:txBody>
-      </p:sp>
-      <p:sp>
-        <p:nvSpPr>
-          <p:cNvPr id="71" name="arrow"/>
-          <p:cNvSpPr>
-            <a:spLocks noGrp="1"/>
-          </p:cNvSpPr>
-          <p:nvPr/>
-        </p:nvSpPr>
-        <p:spPr>
-          <a:xfrm>
-            <a:off x="2697480" y="3246120"/>
-            <a:ext cx="914" cy="914400"/>
-          </a:xfrm>
-          <a:prstGeom prst="straightConnector1">
-            <a:avLst/>
-          </a:prstGeom>
-          <a:noFill/>
-          <a:ln w="19050">
-            <a:solidFill>
-              <a:srgbClr val="AAAACC"/>
-            </a:solidFill>
-            <a:tailEnd type="arrow" w="med" len="med"/>
-          </a:ln>
-        </p:spPr>
-        <p:txBody>
-          <a:bodyPr/>
-          <a:lstStyle/>
-          <a:p>
-            <a:endParaRPr/>
-          </a:p>
-        </p:txBody>
-      </p:sp>
-    </p:spTree>
-  </p:cSld>
-  <p:clrMapOvr>
-    <a:masterClrMapping/>
-  </p:clrMapOvr>
-</p:sld>
-</file>
-
-<file path=ppt/slides/slide7.xml><?xml version="1.0" encoding="utf-8"?>
-<p:sld xmlns:a="http://schemas.openxmlformats.org/drawingml/2006/main" xmlns:r="http://schemas.openxmlformats.org/officeDocument/2006/relationships" xmlns:p="http://schemas.openxmlformats.org/presentationml/2006/main">
   <p:cSld name="Slide 6">
     <p:bg>
       <p:bgPr>
@@ -16125,9 +13856,84 @@
           <a:chExt cx="0" cy="0"/>
         </a:xfrm>
       </p:grpSpPr>
-      <p:sp>
-        <p:nvSpPr>
-          <p:cNvPr id="2" name="Text 0"/>
+      <p:pic>
+        <p:nvPicPr>
+          <p:cNvPr id="26" name="Picture 25">
+            <a:extLst>
+              <a:ext uri="{FF2B5EF4-FFF2-40B4-BE49-F238E27FC236}">
+                <a16:creationId xmlns:a16="http://schemas.microsoft.com/office/drawing/2014/main" id="{135B155A-EB50-01B8-C728-4548DFC648CA}"/>
+              </a:ext>
+            </a:extLst>
+          </p:cNvPr>
+          <p:cNvPicPr>
+            <a:picLocks noChangeAspect="1"/>
+          </p:cNvPicPr>
+          <p:nvPr/>
+        </p:nvPicPr>
+        <p:blipFill>
+          <a:blip r:embed="rId3"/>
+          <a:stretch>
+            <a:fillRect/>
+          </a:stretch>
+        </p:blipFill>
+        <p:spPr>
+          <a:xfrm>
+            <a:off x="0" y="38977"/>
+            <a:ext cx="9144000" cy="5065546"/>
+          </a:xfrm>
+          <a:prstGeom prst="rect">
+            <a:avLst/>
+          </a:prstGeom>
+        </p:spPr>
+      </p:pic>
+    </p:spTree>
+  </p:cSld>
+  <p:clrMapOvr>
+    <a:masterClrMapping/>
+  </p:clrMapOvr>
+</p:sld>
+</file>
+
+<file path=ppt/slides/slide7.xml><?xml version="1.0" encoding="utf-8"?>
+<p:sld xmlns:a="http://schemas.openxmlformats.org/drawingml/2006/main" xmlns:r="http://schemas.openxmlformats.org/officeDocument/2006/relationships" xmlns:p="http://schemas.openxmlformats.org/presentationml/2006/main">
+  <p:cSld>
+    <p:bg>
+      <p:bgPr>
+        <a:solidFill>
+          <a:srgbClr val="F7FBFF"/>
+        </a:solidFill>
+        <a:effectLst/>
+      </p:bgPr>
+    </p:bg>
+    <p:spTree>
+      <p:nvGrpSpPr>
+        <p:cNvPr id="1" name="">
+          <a:extLst>
+            <a:ext uri="{FF2B5EF4-FFF2-40B4-BE49-F238E27FC236}">
+              <a16:creationId xmlns:a16="http://schemas.microsoft.com/office/drawing/2014/main" id="{58DCE69E-CD5D-3D69-A746-3263CF846C70}"/>
+            </a:ext>
+          </a:extLst>
+        </p:cNvPr>
+        <p:cNvGrpSpPr/>
+        <p:nvPr/>
+      </p:nvGrpSpPr>
+      <p:grpSpPr>
+        <a:xfrm>
+          <a:off x="0" y="0"/>
+          <a:ext cx="0" cy="0"/>
+          <a:chOff x="0" y="0"/>
+          <a:chExt cx="0" cy="0"/>
+        </a:xfrm>
+      </p:grpSpPr>
+      <p:sp>
+        <p:nvSpPr>
+          <p:cNvPr id="2" name="Text 0">
+            <a:extLst>
+              <a:ext uri="{FF2B5EF4-FFF2-40B4-BE49-F238E27FC236}">
+                <a16:creationId xmlns:a16="http://schemas.microsoft.com/office/drawing/2014/main" id="{B5E9FF98-91DB-3303-21C5-D313392AC29A}"/>
+              </a:ext>
+            </a:extLst>
+          </p:cNvPr>
           <p:cNvSpPr/>
           <p:nvPr/>
         </p:nvSpPr>
@@ -16166,7 +13972,13 @@
       </p:sp>
       <p:sp>
         <p:nvSpPr>
-          <p:cNvPr id="3" name="Shape 1"/>
+          <p:cNvPr id="3" name="Shape 1">
+            <a:extLst>
+              <a:ext uri="{FF2B5EF4-FFF2-40B4-BE49-F238E27FC236}">
+                <a16:creationId xmlns:a16="http://schemas.microsoft.com/office/drawing/2014/main" id="{9265D6FF-4953-23A6-2DCB-589FF4C44970}"/>
+              </a:ext>
+            </a:extLst>
+          </p:cNvPr>
           <p:cNvSpPr/>
           <p:nvPr/>
         </p:nvSpPr>
@@ -16198,7 +14010,13 @@
       </p:sp>
       <p:sp>
         <p:nvSpPr>
-          <p:cNvPr id="4" name="Shape 2"/>
+          <p:cNvPr id="4" name="Shape 2">
+            <a:extLst>
+              <a:ext uri="{FF2B5EF4-FFF2-40B4-BE49-F238E27FC236}">
+                <a16:creationId xmlns:a16="http://schemas.microsoft.com/office/drawing/2014/main" id="{853EBA15-F22A-C6AE-98B2-F8C77F83E672}"/>
+              </a:ext>
+            </a:extLst>
+          </p:cNvPr>
           <p:cNvSpPr/>
           <p:nvPr/>
         </p:nvSpPr>
@@ -16230,7 +14048,13 @@
       </p:sp>
       <p:sp>
         <p:nvSpPr>
-          <p:cNvPr id="5" name="Text 3"/>
+          <p:cNvPr id="5" name="Text 3">
+            <a:extLst>
+              <a:ext uri="{FF2B5EF4-FFF2-40B4-BE49-F238E27FC236}">
+                <a16:creationId xmlns:a16="http://schemas.microsoft.com/office/drawing/2014/main" id="{3540B555-58EF-CE43-B9A9-DC761AED2C57}"/>
+              </a:ext>
+            </a:extLst>
+          </p:cNvPr>
           <p:cNvSpPr/>
           <p:nvPr/>
         </p:nvSpPr>
@@ -16269,7 +14093,13 @@
       </p:sp>
       <p:sp>
         <p:nvSpPr>
-          <p:cNvPr id="6" name="Shape 4"/>
+          <p:cNvPr id="6" name="Shape 4">
+            <a:extLst>
+              <a:ext uri="{FF2B5EF4-FFF2-40B4-BE49-F238E27FC236}">
+                <a16:creationId xmlns:a16="http://schemas.microsoft.com/office/drawing/2014/main" id="{561C50AD-2027-1071-D66D-7970D4E773E2}"/>
+              </a:ext>
+            </a:extLst>
+          </p:cNvPr>
           <p:cNvSpPr/>
           <p:nvPr/>
         </p:nvSpPr>
@@ -16299,7 +14129,13 @@
       </p:sp>
       <p:sp>
         <p:nvSpPr>
-          <p:cNvPr id="7" name="Text 5"/>
+          <p:cNvPr id="7" name="Text 5">
+            <a:extLst>
+              <a:ext uri="{FF2B5EF4-FFF2-40B4-BE49-F238E27FC236}">
+                <a16:creationId xmlns:a16="http://schemas.microsoft.com/office/drawing/2014/main" id="{6DD2E882-687F-7284-4871-8C112A9D746F}"/>
+              </a:ext>
+            </a:extLst>
+          </p:cNvPr>
           <p:cNvSpPr/>
           <p:nvPr/>
         </p:nvSpPr>
@@ -16338,7 +14174,13 @@
       </p:sp>
       <p:sp>
         <p:nvSpPr>
-          <p:cNvPr id="8" name="Shape 6"/>
+          <p:cNvPr id="8" name="Shape 6">
+            <a:extLst>
+              <a:ext uri="{FF2B5EF4-FFF2-40B4-BE49-F238E27FC236}">
+                <a16:creationId xmlns:a16="http://schemas.microsoft.com/office/drawing/2014/main" id="{D9E14FF6-34DC-25B3-0976-3F057A398098}"/>
+              </a:ext>
+            </a:extLst>
+          </p:cNvPr>
           <p:cNvSpPr/>
           <p:nvPr/>
         </p:nvSpPr>
@@ -16370,7 +14212,13 @@
       </p:sp>
       <p:sp>
         <p:nvSpPr>
-          <p:cNvPr id="9" name="Text 7"/>
+          <p:cNvPr id="9" name="Text 7">
+            <a:extLst>
+              <a:ext uri="{FF2B5EF4-FFF2-40B4-BE49-F238E27FC236}">
+                <a16:creationId xmlns:a16="http://schemas.microsoft.com/office/drawing/2014/main" id="{2BCED0E7-D468-BEFF-EDAC-2F8825783057}"/>
+              </a:ext>
+            </a:extLst>
+          </p:cNvPr>
           <p:cNvSpPr/>
           <p:nvPr/>
         </p:nvSpPr>
@@ -16409,7 +14257,13 @@
       </p:sp>
       <p:sp>
         <p:nvSpPr>
-          <p:cNvPr id="10" name="Shape 8"/>
+          <p:cNvPr id="10" name="Shape 8">
+            <a:extLst>
+              <a:ext uri="{FF2B5EF4-FFF2-40B4-BE49-F238E27FC236}">
+                <a16:creationId xmlns:a16="http://schemas.microsoft.com/office/drawing/2014/main" id="{A5DD9EE9-B9A3-BA4A-2176-4798A05D5537}"/>
+              </a:ext>
+            </a:extLst>
+          </p:cNvPr>
           <p:cNvSpPr/>
           <p:nvPr/>
         </p:nvSpPr>
@@ -16439,7 +14293,13 @@
       </p:sp>
       <p:sp>
         <p:nvSpPr>
-          <p:cNvPr id="11" name="Text 9"/>
+          <p:cNvPr id="11" name="Text 9">
+            <a:extLst>
+              <a:ext uri="{FF2B5EF4-FFF2-40B4-BE49-F238E27FC236}">
+                <a16:creationId xmlns:a16="http://schemas.microsoft.com/office/drawing/2014/main" id="{FB339371-89B6-B915-02B5-997F33B557C9}"/>
+              </a:ext>
+            </a:extLst>
+          </p:cNvPr>
           <p:cNvSpPr/>
           <p:nvPr/>
         </p:nvSpPr>
@@ -16478,7 +14338,13 @@
       </p:sp>
       <p:sp>
         <p:nvSpPr>
-          <p:cNvPr id="12" name="Shape 10"/>
+          <p:cNvPr id="12" name="Shape 10">
+            <a:extLst>
+              <a:ext uri="{FF2B5EF4-FFF2-40B4-BE49-F238E27FC236}">
+                <a16:creationId xmlns:a16="http://schemas.microsoft.com/office/drawing/2014/main" id="{93000C38-A8A2-18D2-FB04-325245702ECB}"/>
+              </a:ext>
+            </a:extLst>
+          </p:cNvPr>
           <p:cNvSpPr/>
           <p:nvPr/>
         </p:nvSpPr>
@@ -16510,7 +14376,13 @@
       </p:sp>
       <p:sp>
         <p:nvSpPr>
-          <p:cNvPr id="13" name="Text 11"/>
+          <p:cNvPr id="13" name="Text 11">
+            <a:extLst>
+              <a:ext uri="{FF2B5EF4-FFF2-40B4-BE49-F238E27FC236}">
+                <a16:creationId xmlns:a16="http://schemas.microsoft.com/office/drawing/2014/main" id="{C13A52FC-E8A8-149B-6D7E-A7BF56AD5230}"/>
+              </a:ext>
+            </a:extLst>
+          </p:cNvPr>
           <p:cNvSpPr/>
           <p:nvPr/>
         </p:nvSpPr>
@@ -16549,7 +14421,13 @@
       </p:sp>
       <p:sp>
         <p:nvSpPr>
-          <p:cNvPr id="14" name="Shape 12"/>
+          <p:cNvPr id="14" name="Shape 12">
+            <a:extLst>
+              <a:ext uri="{FF2B5EF4-FFF2-40B4-BE49-F238E27FC236}">
+                <a16:creationId xmlns:a16="http://schemas.microsoft.com/office/drawing/2014/main" id="{14310296-07DD-DD50-B35F-0994FFCF4508}"/>
+              </a:ext>
+            </a:extLst>
+          </p:cNvPr>
           <p:cNvSpPr/>
           <p:nvPr/>
         </p:nvSpPr>
@@ -16579,7 +14457,13 @@
       </p:sp>
       <p:sp>
         <p:nvSpPr>
-          <p:cNvPr id="15" name="Text 13"/>
+          <p:cNvPr id="15" name="Text 13">
+            <a:extLst>
+              <a:ext uri="{FF2B5EF4-FFF2-40B4-BE49-F238E27FC236}">
+                <a16:creationId xmlns:a16="http://schemas.microsoft.com/office/drawing/2014/main" id="{E492EFB3-0F3D-A5EF-3E24-C86AF4C02CA1}"/>
+              </a:ext>
+            </a:extLst>
+          </p:cNvPr>
           <p:cNvSpPr/>
           <p:nvPr/>
         </p:nvSpPr>
@@ -16618,7 +14502,13 @@
       </p:sp>
       <p:sp>
         <p:nvSpPr>
-          <p:cNvPr id="16" name="Shape 14"/>
+          <p:cNvPr id="16" name="Shape 14">
+            <a:extLst>
+              <a:ext uri="{FF2B5EF4-FFF2-40B4-BE49-F238E27FC236}">
+                <a16:creationId xmlns:a16="http://schemas.microsoft.com/office/drawing/2014/main" id="{BD39F1BC-5A5A-1A92-E153-95651C174FE2}"/>
+              </a:ext>
+            </a:extLst>
+          </p:cNvPr>
           <p:cNvSpPr/>
           <p:nvPr/>
         </p:nvSpPr>
@@ -16650,7 +14540,13 @@
       </p:sp>
       <p:sp>
         <p:nvSpPr>
-          <p:cNvPr id="17" name="Text 15"/>
+          <p:cNvPr id="17" name="Text 15">
+            <a:extLst>
+              <a:ext uri="{FF2B5EF4-FFF2-40B4-BE49-F238E27FC236}">
+                <a16:creationId xmlns:a16="http://schemas.microsoft.com/office/drawing/2014/main" id="{49CFE305-200A-8230-5293-7E7311CB3638}"/>
+              </a:ext>
+            </a:extLst>
+          </p:cNvPr>
           <p:cNvSpPr/>
           <p:nvPr/>
         </p:nvSpPr>
@@ -16689,7 +14585,13 @@
       </p:sp>
       <p:sp>
         <p:nvSpPr>
-          <p:cNvPr id="18" name="Shape 16"/>
+          <p:cNvPr id="18" name="Shape 16">
+            <a:extLst>
+              <a:ext uri="{FF2B5EF4-FFF2-40B4-BE49-F238E27FC236}">
+                <a16:creationId xmlns:a16="http://schemas.microsoft.com/office/drawing/2014/main" id="{401B3E0B-DA2C-C238-7DAA-20CFF6F0CCEC}"/>
+              </a:ext>
+            </a:extLst>
+          </p:cNvPr>
           <p:cNvSpPr/>
           <p:nvPr/>
         </p:nvSpPr>
@@ -16719,7 +14621,13 @@
       </p:sp>
       <p:sp>
         <p:nvSpPr>
-          <p:cNvPr id="19" name="Text 17"/>
+          <p:cNvPr id="19" name="Text 17">
+            <a:extLst>
+              <a:ext uri="{FF2B5EF4-FFF2-40B4-BE49-F238E27FC236}">
+                <a16:creationId xmlns:a16="http://schemas.microsoft.com/office/drawing/2014/main" id="{D6D47055-0D47-879E-2083-33343B9FB5EF}"/>
+              </a:ext>
+            </a:extLst>
+          </p:cNvPr>
           <p:cNvSpPr/>
           <p:nvPr/>
         </p:nvSpPr>
@@ -16758,7 +14666,13 @@
       </p:sp>
       <p:sp>
         <p:nvSpPr>
-          <p:cNvPr id="20" name="Shape 18"/>
+          <p:cNvPr id="20" name="Shape 18">
+            <a:extLst>
+              <a:ext uri="{FF2B5EF4-FFF2-40B4-BE49-F238E27FC236}">
+                <a16:creationId xmlns:a16="http://schemas.microsoft.com/office/drawing/2014/main" id="{56C092A9-2A47-6474-6617-3524E86E0397}"/>
+              </a:ext>
+            </a:extLst>
+          </p:cNvPr>
           <p:cNvSpPr/>
           <p:nvPr/>
         </p:nvSpPr>
@@ -16790,7 +14704,13 @@
       </p:sp>
       <p:sp>
         <p:nvSpPr>
-          <p:cNvPr id="21" name="Text 19"/>
+          <p:cNvPr id="21" name="Text 19">
+            <a:extLst>
+              <a:ext uri="{FF2B5EF4-FFF2-40B4-BE49-F238E27FC236}">
+                <a16:creationId xmlns:a16="http://schemas.microsoft.com/office/drawing/2014/main" id="{2DE4AC79-DAF6-FBBF-A045-1D2E0F38C4CC}"/>
+              </a:ext>
+            </a:extLst>
+          </p:cNvPr>
           <p:cNvSpPr/>
           <p:nvPr/>
         </p:nvSpPr>
@@ -16829,7 +14749,13 @@
       </p:sp>
       <p:sp>
         <p:nvSpPr>
-          <p:cNvPr id="22" name="Text 20"/>
+          <p:cNvPr id="22" name="Text 20">
+            <a:extLst>
+              <a:ext uri="{FF2B5EF4-FFF2-40B4-BE49-F238E27FC236}">
+                <a16:creationId xmlns:a16="http://schemas.microsoft.com/office/drawing/2014/main" id="{06E598A1-92E0-0D81-49A2-2D076E7EBF87}"/>
+              </a:ext>
+            </a:extLst>
+          </p:cNvPr>
           <p:cNvSpPr/>
           <p:nvPr/>
         </p:nvSpPr>
@@ -16868,7 +14794,13 @@
       </p:sp>
       <p:sp>
         <p:nvSpPr>
-          <p:cNvPr id="23" name="Shape 21"/>
+          <p:cNvPr id="23" name="Shape 21">
+            <a:extLst>
+              <a:ext uri="{FF2B5EF4-FFF2-40B4-BE49-F238E27FC236}">
+                <a16:creationId xmlns:a16="http://schemas.microsoft.com/office/drawing/2014/main" id="{E9850A5D-B891-0E65-08EF-FA752FA46051}"/>
+              </a:ext>
+            </a:extLst>
+          </p:cNvPr>
           <p:cNvSpPr/>
           <p:nvPr/>
         </p:nvSpPr>
@@ -16900,7 +14832,13 @@
       </p:sp>
       <p:sp>
         <p:nvSpPr>
-          <p:cNvPr id="24" name="Text 22"/>
+          <p:cNvPr id="24" name="Text 22">
+            <a:extLst>
+              <a:ext uri="{FF2B5EF4-FFF2-40B4-BE49-F238E27FC236}">
+                <a16:creationId xmlns:a16="http://schemas.microsoft.com/office/drawing/2014/main" id="{A39F7EE2-1C47-998B-2DCB-DC20F2912A83}"/>
+              </a:ext>
+            </a:extLst>
+          </p:cNvPr>
           <p:cNvSpPr/>
           <p:nvPr/>
         </p:nvSpPr>
@@ -16938,6 +14876,11 @@
         </p:txBody>
       </p:sp>
     </p:spTree>
+    <p:extLst>
+      <p:ext uri="{BB962C8B-B14F-4D97-AF65-F5344CB8AC3E}">
+        <p14:creationId xmlns:p14="http://schemas.microsoft.com/office/powerpoint/2010/main" val="2221109129"/>
+      </p:ext>
+    </p:extLst>
   </p:cSld>
   <p:clrMapOvr>
     <a:masterClrMapping/>
